--- a/examples/architecture-diagram/architecture.pptx
+++ b/examples/architecture-diagram/architecture.pptx
@@ -6,6 +6,7 @@
   </p:sldMasterIdLst>
   <p:sldIdLst>
     <p:sldId id="256" r:id="rId7"/>
+    <p:sldId id="257" r:id="rId9"/>
   </p:sldIdLst>
   <p:sldSz cx="12192000" cy="6858000" type="screen4x3"/>
   <p:notesSz cx="6858000" cy="9144000"/>
@@ -458,6 +459,76 @@
 </file>
 
 <file path=ppt/notesSlides/notesSlide1.xml><?xml version="1.0" encoding="utf-8"?>
+<p:notes xmlns:a="http://schemas.openxmlformats.org/drawingml/2006/main" xmlns:p="http://schemas.openxmlformats.org/presentationml/2006/main" xmlns:r="http://schemas.openxmlformats.org/officeDocument/2006/relationships">
+  <p:cSld>
+    <p:spTree>
+      <p:nvGrpSpPr>
+        <p:cNvPr id="1" name=""/>
+        <p:cNvGrpSpPr/>
+        <p:nvPr/>
+      </p:nvGrpSpPr>
+      <p:grpSpPr>
+        <a:xfrm>
+          <a:off x="0" y="0"/>
+          <a:ext cx="0" cy="0"/>
+          <a:chOff x="0" y="0"/>
+          <a:chExt cx="0" cy="0"/>
+        </a:xfrm>
+      </p:grpSpPr>
+      <p:sp>
+        <p:nvSpPr>
+          <p:cNvPr id="2" name="Slide Image Placeholder 1"/>
+          <p:cNvSpPr>
+            <a:spLocks noGrp="1"/>
+          </p:cNvSpPr>
+          <p:nvPr>
+            <p:ph type="sldImg" idx="2"/>
+          </p:nvPr>
+        </p:nvSpPr>
+        <p:spPr/>
+      </p:sp>
+      <p:sp>
+        <p:nvSpPr>
+          <p:cNvPr id="3" name="Notes Placeholder 2"/>
+          <p:cNvSpPr>
+            <a:spLocks noGrp="1"/>
+          </p:cNvSpPr>
+          <p:nvPr>
+            <p:ph type="body" idx="3" sz="quarter"/>
+          </p:nvPr>
+        </p:nvSpPr>
+        <p:spPr/>
+        <p:txBody>
+          <a:bodyPr/>
+          <a:lstStyle/>
+          <a:p>
+            <a:r>
+              <a:t>Transformer encoder stack. Token stream to pooled representation, with one block opened up</a:t>
+            </a:r>
+          </a:p>
+        </p:txBody>
+      </p:sp>
+      <p:sp>
+        <p:nvSpPr>
+          <p:cNvPr id="4" name="Slide Number Placeholder 3"/>
+          <p:cNvSpPr>
+            <a:spLocks noGrp="1"/>
+          </p:cNvSpPr>
+          <p:nvPr>
+            <p:ph type="sldNum" idx="5" sz="quarter"/>
+          </p:nvPr>
+        </p:nvSpPr>
+        <p:spPr/>
+      </p:sp>
+    </p:spTree>
+  </p:cSld>
+  <p:clrMapOvr>
+    <a:masterClrMapping/>
+  </p:clrMapOvr>
+</p:notes>
+</file>
+
+<file path=ppt/notesSlides/notesSlide2.xml><?xml version="1.0" encoding="utf-8"?>
 <p:notes xmlns:a="http://schemas.openxmlformats.org/drawingml/2006/main" xmlns:p="http://schemas.openxmlformats.org/presentationml/2006/main" xmlns:r="http://schemas.openxmlformats.org/officeDocument/2006/relationships">
   <p:cSld>
     <p:spTree>
@@ -3560,11 +3631,11 @@
         <p:spPr>
           <a:xfrm>
             <a:off x="487680" y="1300480"/>
-            <a:ext cx="10891520" cy="1544320"/>
+            <a:ext cx="9591040" cy="2763520"/>
           </a:xfrm>
           <a:prstGeom prst="roundRect">
             <a:avLst>
-              <a:gd name="adj" fmla="val 5263"/>
+              <a:gd name="adj" fmla="val 2941"/>
             </a:avLst>
           </a:prstGeom>
           <a:noFill/>
@@ -3614,28 +3685,6 @@
               <a:t>1. Forward path  (encoder stack, N=24)</a:t>
             </a:r>
           </a:p>
-          <a:p>
-            <a:pPr algn="ctr">
-              <a:lnSpc>
-                <a:spcPts val="1728"/>
-              </a:lnSpc>
-              <a:spcBef>
-                <a:spcPts val="4144"/>
-              </a:spcBef>
-              <a:spcAft>
-                <a:spcPts val="0"/>
-              </a:spcAft>
-            </a:pPr>
-            <a:r>
-              <a:rPr sz="1800" b="1">
-                <a:solidFill>
-                  <a:srgbClr val="64748B"/>
-                </a:solidFill>
-                <a:latin typeface="Arial"/>
-              </a:rPr>
-              <a:t>• • •</a:t>
-            </a:r>
-          </a:p>
         </p:txBody>
       </p:sp>
       <p:sp>
@@ -3646,8 +3695,8 @@
         </p:nvSpPr>
         <p:spPr>
           <a:xfrm>
-            <a:off x="731520" y="1869440"/>
-            <a:ext cx="1869440" cy="731520"/>
+            <a:off x="731520" y="1950720"/>
+            <a:ext cx="1625600" cy="731520"/>
           </a:xfrm>
           <a:prstGeom prst="roundRect">
             <a:avLst>
@@ -3699,7 +3748,7 @@
                 </a:solidFill>
                 <a:latin typeface="Arial"/>
               </a:rPr>
-              <a:t>Embedding</a:t>
+              <a:t>Token ids</a:t>
             </a:r>
           </a:p>
           <a:p>
@@ -3721,7 +3770,7 @@
                 </a:solidFill>
                 <a:latin typeface="Arial"/>
               </a:rPr>
-              <a:t>(B,L) to (B,L,d)</a:t>
+              <a:t>(B, L)</a:t>
             </a:r>
           </a:p>
         </p:txBody>
@@ -3734,7 +3783,205 @@
         </p:nvSpPr>
         <p:spPr>
           <a:xfrm>
-            <a:off x="2844800" y="1869440"/>
+            <a:off x="2600960" y="1869440"/>
+            <a:ext cx="1950720" cy="975360"/>
+          </a:xfrm>
+          <a:prstGeom prst="roundRect">
+            <a:avLst>
+              <a:gd name="adj" fmla="val 8333"/>
+            </a:avLst>
+          </a:prstGeom>
+          <a:solidFill>
+            <a:srgbClr val="F8FAFC"/>
+          </a:solidFill>
+          <a:ln w="19050">
+            <a:solidFill>
+              <a:srgbClr val="475569"/>
+            </a:solidFill>
+          </a:ln>
+        </p:spPr>
+        <p:style>
+          <a:lnRef idx="1">
+            <a:schemeClr val="accent1"/>
+          </a:lnRef>
+          <a:fillRef idx="3">
+            <a:schemeClr val="accent1"/>
+          </a:fillRef>
+          <a:effectRef idx="2">
+            <a:schemeClr val="accent1"/>
+          </a:effectRef>
+          <a:fontRef idx="minor">
+            <a:schemeClr val="lt1"/>
+          </a:fontRef>
+        </p:style>
+        <p:txBody>
+          <a:bodyPr rtlCol="0" anchor="t" wrap="none" lIns="0" rIns="0" tIns="208280" bIns="0"/>
+          <a:lstStyle/>
+          <a:p>
+            <a:pPr algn="l" marL="162560">
+              <a:lnSpc>
+                <a:spcPts val="1728"/>
+              </a:lnSpc>
+              <a:spcBef>
+                <a:spcPts val="0"/>
+              </a:spcBef>
+              <a:spcAft>
+                <a:spcPts val="0"/>
+              </a:spcAft>
+            </a:pPr>
+            <a:r>
+              <a:rPr sz="1800" b="1">
+                <a:solidFill>
+                  <a:srgbClr val="374151"/>
+                </a:solidFill>
+                <a:latin typeface="Arial"/>
+              </a:rPr>
+              <a:t>Embedding</a:t>
+            </a:r>
+          </a:p>
+          <a:p>
+            <a:pPr algn="l" marL="162560">
+              <a:lnSpc>
+                <a:spcPts val="1536"/>
+              </a:lnSpc>
+              <a:spcBef>
+                <a:spcPts val="192"/>
+              </a:spcBef>
+              <a:spcAft>
+                <a:spcPts val="0"/>
+              </a:spcAft>
+            </a:pPr>
+            <a:r>
+              <a:rPr sz="1600">
+                <a:solidFill>
+                  <a:srgbClr val="64748B"/>
+                </a:solidFill>
+                <a:latin typeface="Arial"/>
+              </a:rPr>
+              <a:t>vocab 32k, tied</a:t>
+            </a:r>
+          </a:p>
+          <a:p>
+            <a:pPr algn="l" marL="162560">
+              <a:lnSpc>
+                <a:spcPts val="1536"/>
+              </a:lnSpc>
+              <a:spcBef>
+                <a:spcPts val="544"/>
+              </a:spcBef>
+              <a:spcAft>
+                <a:spcPts val="0"/>
+              </a:spcAft>
+            </a:pPr>
+            <a:r>
+              <a:rPr sz="1600">
+                <a:solidFill>
+                  <a:srgbClr val="64748B"/>
+                </a:solidFill>
+                <a:latin typeface="Arial"/>
+              </a:rPr>
+              <a:t>(B, L, d)</a:t>
+            </a:r>
+          </a:p>
+        </p:txBody>
+      </p:sp>
+      <p:sp>
+        <p:nvSpPr>
+          <p:cNvPr id="6" name="Rounded Rectangle 5"/>
+          <p:cNvSpPr/>
+          <p:nvPr/>
+        </p:nvSpPr>
+        <p:spPr>
+          <a:xfrm>
+            <a:off x="4795520" y="1950720"/>
+            <a:ext cx="2275840" cy="731520"/>
+          </a:xfrm>
+          <a:prstGeom prst="roundRect">
+            <a:avLst>
+              <a:gd name="adj" fmla="val 11111"/>
+            </a:avLst>
+          </a:prstGeom>
+          <a:solidFill>
+            <a:srgbClr val="F8FAFC"/>
+          </a:solidFill>
+          <a:ln w="19050">
+            <a:solidFill>
+              <a:srgbClr val="475569"/>
+            </a:solidFill>
+          </a:ln>
+        </p:spPr>
+        <p:style>
+          <a:lnRef idx="1">
+            <a:schemeClr val="accent1"/>
+          </a:lnRef>
+          <a:fillRef idx="3">
+            <a:schemeClr val="accent1"/>
+          </a:fillRef>
+          <a:effectRef idx="2">
+            <a:schemeClr val="accent1"/>
+          </a:effectRef>
+          <a:fontRef idx="minor">
+            <a:schemeClr val="lt1"/>
+          </a:fontRef>
+        </p:style>
+        <p:txBody>
+          <a:bodyPr rtlCol="0" anchor="t" wrap="none" lIns="0" rIns="0" tIns="208280" bIns="0"/>
+          <a:lstStyle/>
+          <a:p>
+            <a:pPr algn="l" marL="162560">
+              <a:lnSpc>
+                <a:spcPts val="1728"/>
+              </a:lnSpc>
+              <a:spcBef>
+                <a:spcPts val="0"/>
+              </a:spcBef>
+              <a:spcAft>
+                <a:spcPts val="0"/>
+              </a:spcAft>
+            </a:pPr>
+            <a:r>
+              <a:rPr sz="1800" b="1">
+                <a:solidFill>
+                  <a:srgbClr val="374151"/>
+                </a:solidFill>
+                <a:latin typeface="Arial"/>
+              </a:rPr>
+              <a:t>Rotary position</a:t>
+            </a:r>
+          </a:p>
+          <a:p>
+            <a:pPr algn="l" marL="162560">
+              <a:lnSpc>
+                <a:spcPts val="1536"/>
+              </a:lnSpc>
+              <a:spcBef>
+                <a:spcPts val="352"/>
+              </a:spcBef>
+              <a:spcAft>
+                <a:spcPts val="0"/>
+              </a:spcAft>
+            </a:pPr>
+            <a:r>
+              <a:rPr sz="1600">
+                <a:solidFill>
+                  <a:srgbClr val="64748B"/>
+                </a:solidFill>
+                <a:latin typeface="Arial"/>
+              </a:rPr>
+              <a:t>(B, L, d)</a:t>
+            </a:r>
+          </a:p>
+        </p:txBody>
+      </p:sp>
+      <p:sp>
+        <p:nvSpPr>
+          <p:cNvPr id="7" name="Rounded Rectangle 6"/>
+          <p:cNvSpPr/>
+          <p:nvPr/>
+        </p:nvSpPr>
+        <p:spPr>
+          <a:xfrm>
+            <a:off x="7315200" y="1950720"/>
             <a:ext cx="1381760" cy="731520"/>
           </a:xfrm>
           <a:prstGeom prst="roundRect">
@@ -3809,20 +4056,82 @@
                 </a:solidFill>
                 <a:latin typeface="Arial"/>
               </a:rPr>
-              <a:t>(B,L,d)</a:t>
-            </a:r>
-          </a:p>
-        </p:txBody>
-      </p:sp>
-      <p:sp>
-        <p:nvSpPr>
-          <p:cNvPr id="6" name="Rounded Rectangle 5"/>
+              <a:t>(B, L, d)</a:t>
+            </a:r>
+          </a:p>
+        </p:txBody>
+      </p:sp>
+      <p:sp>
+        <p:nvSpPr>
+          <p:cNvPr id="8" name="Rectangle 7"/>
           <p:cNvSpPr/>
           <p:nvPr/>
         </p:nvSpPr>
         <p:spPr>
           <a:xfrm>
-            <a:off x="5283200" y="1869440"/>
+            <a:off x="8940800" y="2032000"/>
+            <a:ext cx="894080" cy="650240"/>
+          </a:xfrm>
+          <a:prstGeom prst="rect">
+            <a:avLst/>
+          </a:prstGeom>
+          <a:solidFill>
+            <a:srgbClr val="FFFFFF"/>
+          </a:solidFill>
+          <a:ln>
+            <a:noFill/>
+          </a:ln>
+        </p:spPr>
+        <p:style>
+          <a:lnRef idx="1">
+            <a:schemeClr val="accent1"/>
+          </a:lnRef>
+          <a:fillRef idx="3">
+            <a:schemeClr val="accent1"/>
+          </a:fillRef>
+          <a:effectRef idx="2">
+            <a:schemeClr val="accent1"/>
+          </a:effectRef>
+          <a:fontRef idx="minor">
+            <a:schemeClr val="lt1"/>
+          </a:fontRef>
+        </p:style>
+        <p:txBody>
+          <a:bodyPr rtlCol="0" anchor="t" wrap="none" lIns="0" rIns="0" tIns="320040" bIns="0"/>
+          <a:lstStyle/>
+          <a:p>
+            <a:pPr algn="ctr">
+              <a:lnSpc>
+                <a:spcPts val="1728"/>
+              </a:lnSpc>
+              <a:spcBef>
+                <a:spcPts val="0"/>
+              </a:spcBef>
+              <a:spcAft>
+                <a:spcPts val="0"/>
+              </a:spcAft>
+            </a:pPr>
+            <a:r>
+              <a:rPr sz="1800" b="1">
+                <a:solidFill>
+                  <a:srgbClr val="64748B"/>
+                </a:solidFill>
+                <a:latin typeface="Arial"/>
+              </a:rPr>
+              <a:t>• • •</a:t>
+            </a:r>
+          </a:p>
+        </p:txBody>
+      </p:sp>
+      <p:sp>
+        <p:nvSpPr>
+          <p:cNvPr id="9" name="Rounded Rectangle 8"/>
+          <p:cNvSpPr/>
+          <p:nvPr/>
+        </p:nvSpPr>
+        <p:spPr>
+          <a:xfrm>
+            <a:off x="2357120" y="3088640"/>
             <a:ext cx="1463040" cy="731520"/>
           </a:xfrm>
           <a:prstGeom prst="roundRect">
@@ -3897,20 +4206,20 @@
                 </a:solidFill>
                 <a:latin typeface="Arial"/>
               </a:rPr>
-              <a:t>(B,L,d)</a:t>
-            </a:r>
-          </a:p>
-        </p:txBody>
-      </p:sp>
-      <p:sp>
-        <p:nvSpPr>
-          <p:cNvPr id="7" name="Rounded Rectangle 6"/>
+              <a:t>(B, L, d)</a:t>
+            </a:r>
+          </a:p>
+        </p:txBody>
+      </p:sp>
+      <p:sp>
+        <p:nvSpPr>
+          <p:cNvPr id="10" name="Rounded Rectangle 9"/>
           <p:cNvSpPr/>
           <p:nvPr/>
         </p:nvSpPr>
         <p:spPr>
           <a:xfrm>
-            <a:off x="6990080" y="1869440"/>
+            <a:off x="4064000" y="3088640"/>
             <a:ext cx="1706880" cy="731520"/>
           </a:xfrm>
           <a:prstGeom prst="roundRect">
@@ -3992,13 +4301,13 @@
       </p:sp>
       <p:sp>
         <p:nvSpPr>
-          <p:cNvPr id="8" name="Rounded Rectangle 7"/>
+          <p:cNvPr id="11" name="Rounded Rectangle 10"/>
           <p:cNvSpPr/>
           <p:nvPr/>
         </p:nvSpPr>
         <p:spPr>
           <a:xfrm>
-            <a:off x="8940800" y="1869440"/>
+            <a:off x="6014720" y="3088640"/>
             <a:ext cx="2194560" cy="731520"/>
           </a:xfrm>
           <a:prstGeom prst="roundRect">
@@ -4078,20 +4387,506 @@
           </a:p>
         </p:txBody>
       </p:sp>
-      <p:sp>
-        <p:nvSpPr>
-          <p:cNvPr id="9" name="Rounded Rectangle 8"/>
+      <p:cxnSp>
+        <p:nvCxnSpPr>
+          <p:cNvPr id="12" name="Connector 11"/>
+          <p:cNvCxnSpPr/>
+          <p:nvPr/>
+        </p:nvCxnSpPr>
+        <p:spPr>
+          <a:xfrm>
+            <a:off x="2357120" y="2316480"/>
+            <a:ext cx="81280" cy="0"/>
+          </a:xfrm>
+          <a:prstGeom prst="line">
+            <a:avLst/>
+          </a:prstGeom>
+          <a:ln w="25400">
+            <a:solidFill>
+              <a:srgbClr val="475569"/>
+            </a:solidFill>
+          </a:ln>
+        </p:spPr>
+        <p:style>
+          <a:lnRef idx="2">
+            <a:schemeClr val="accent1"/>
+          </a:lnRef>
+          <a:fillRef idx="0">
+            <a:schemeClr val="accent1"/>
+          </a:fillRef>
+          <a:effectRef idx="1">
+            <a:schemeClr val="accent1"/>
+          </a:effectRef>
+          <a:fontRef idx="minor">
+            <a:schemeClr val="tx1"/>
+          </a:fontRef>
+        </p:style>
+      </p:cxnSp>
+      <p:cxnSp>
+        <p:nvCxnSpPr>
+          <p:cNvPr id="13" name="Connector 12"/>
+          <p:cNvCxnSpPr/>
+          <p:nvPr/>
+        </p:nvCxnSpPr>
+        <p:spPr>
+          <a:xfrm>
+            <a:off x="2438400" y="2316480"/>
+            <a:ext cx="0" cy="40640"/>
+          </a:xfrm>
+          <a:prstGeom prst="line">
+            <a:avLst/>
+          </a:prstGeom>
+          <a:ln w="25400">
+            <a:solidFill>
+              <a:srgbClr val="475569"/>
+            </a:solidFill>
+          </a:ln>
+        </p:spPr>
+        <p:style>
+          <a:lnRef idx="2">
+            <a:schemeClr val="accent1"/>
+          </a:lnRef>
+          <a:fillRef idx="0">
+            <a:schemeClr val="accent1"/>
+          </a:fillRef>
+          <a:effectRef idx="1">
+            <a:schemeClr val="accent1"/>
+          </a:effectRef>
+          <a:fontRef idx="minor">
+            <a:schemeClr val="tx1"/>
+          </a:fontRef>
+        </p:style>
+      </p:cxnSp>
+      <p:cxnSp>
+        <p:nvCxnSpPr>
+          <p:cNvPr id="14" name="Connector 13"/>
+          <p:cNvCxnSpPr/>
+          <p:nvPr/>
+        </p:nvCxnSpPr>
+        <p:spPr>
+          <a:xfrm>
+            <a:off x="2438400" y="2357120"/>
+            <a:ext cx="162560" cy="0"/>
+          </a:xfrm>
+          <a:prstGeom prst="line">
+            <a:avLst/>
+          </a:prstGeom>
+          <a:ln w="25400">
+            <a:solidFill>
+              <a:srgbClr val="475569"/>
+            </a:solidFill>
+            <a:tailEnd type="triangle" w="med" len="med"/>
+          </a:ln>
+        </p:spPr>
+        <p:style>
+          <a:lnRef idx="2">
+            <a:schemeClr val="accent1"/>
+          </a:lnRef>
+          <a:fillRef idx="0">
+            <a:schemeClr val="accent1"/>
+          </a:fillRef>
+          <a:effectRef idx="1">
+            <a:schemeClr val="accent1"/>
+          </a:effectRef>
+          <a:fontRef idx="minor">
+            <a:schemeClr val="tx1"/>
+          </a:fontRef>
+        </p:style>
+      </p:cxnSp>
+      <p:cxnSp>
+        <p:nvCxnSpPr>
+          <p:cNvPr id="15" name="Connector 14"/>
+          <p:cNvCxnSpPr/>
+          <p:nvPr/>
+        </p:nvCxnSpPr>
+        <p:spPr>
+          <a:xfrm>
+            <a:off x="4551680" y="2357120"/>
+            <a:ext cx="81280" cy="0"/>
+          </a:xfrm>
+          <a:prstGeom prst="line">
+            <a:avLst/>
+          </a:prstGeom>
+          <a:ln w="25400">
+            <a:solidFill>
+              <a:srgbClr val="475569"/>
+            </a:solidFill>
+          </a:ln>
+        </p:spPr>
+        <p:style>
+          <a:lnRef idx="2">
+            <a:schemeClr val="accent1"/>
+          </a:lnRef>
+          <a:fillRef idx="0">
+            <a:schemeClr val="accent1"/>
+          </a:fillRef>
+          <a:effectRef idx="1">
+            <a:schemeClr val="accent1"/>
+          </a:effectRef>
+          <a:fontRef idx="minor">
+            <a:schemeClr val="tx1"/>
+          </a:fontRef>
+        </p:style>
+      </p:cxnSp>
+      <p:cxnSp>
+        <p:nvCxnSpPr>
+          <p:cNvPr id="16" name="Connector 15"/>
+          <p:cNvCxnSpPr/>
+          <p:nvPr/>
+        </p:nvCxnSpPr>
+        <p:spPr>
+          <a:xfrm flipV="1">
+            <a:off x="4632960" y="2316480"/>
+            <a:ext cx="0" cy="40640"/>
+          </a:xfrm>
+          <a:prstGeom prst="line">
+            <a:avLst/>
+          </a:prstGeom>
+          <a:ln w="25400">
+            <a:solidFill>
+              <a:srgbClr val="475569"/>
+            </a:solidFill>
+          </a:ln>
+        </p:spPr>
+        <p:style>
+          <a:lnRef idx="2">
+            <a:schemeClr val="accent1"/>
+          </a:lnRef>
+          <a:fillRef idx="0">
+            <a:schemeClr val="accent1"/>
+          </a:fillRef>
+          <a:effectRef idx="1">
+            <a:schemeClr val="accent1"/>
+          </a:effectRef>
+          <a:fontRef idx="minor">
+            <a:schemeClr val="tx1"/>
+          </a:fontRef>
+        </p:style>
+      </p:cxnSp>
+      <p:cxnSp>
+        <p:nvCxnSpPr>
+          <p:cNvPr id="17" name="Connector 16"/>
+          <p:cNvCxnSpPr/>
+          <p:nvPr/>
+        </p:nvCxnSpPr>
+        <p:spPr>
+          <a:xfrm>
+            <a:off x="4632960" y="2316480"/>
+            <a:ext cx="162560" cy="0"/>
+          </a:xfrm>
+          <a:prstGeom prst="line">
+            <a:avLst/>
+          </a:prstGeom>
+          <a:ln w="25400">
+            <a:solidFill>
+              <a:srgbClr val="475569"/>
+            </a:solidFill>
+            <a:tailEnd type="triangle" w="med" len="med"/>
+          </a:ln>
+        </p:spPr>
+        <p:style>
+          <a:lnRef idx="2">
+            <a:schemeClr val="accent1"/>
+          </a:lnRef>
+          <a:fillRef idx="0">
+            <a:schemeClr val="accent1"/>
+          </a:fillRef>
+          <a:effectRef idx="1">
+            <a:schemeClr val="accent1"/>
+          </a:effectRef>
+          <a:fontRef idx="minor">
+            <a:schemeClr val="tx1"/>
+          </a:fontRef>
+        </p:style>
+      </p:cxnSp>
+      <p:cxnSp>
+        <p:nvCxnSpPr>
+          <p:cNvPr id="18" name="Connector 17"/>
+          <p:cNvCxnSpPr/>
+          <p:nvPr/>
+        </p:nvCxnSpPr>
+        <p:spPr>
+          <a:xfrm>
+            <a:off x="7071360" y="2316480"/>
+            <a:ext cx="243840" cy="0"/>
+          </a:xfrm>
+          <a:prstGeom prst="line">
+            <a:avLst/>
+          </a:prstGeom>
+          <a:ln w="25400">
+            <a:solidFill>
+              <a:srgbClr val="475569"/>
+            </a:solidFill>
+            <a:tailEnd type="triangle" w="med" len="med"/>
+          </a:ln>
+        </p:spPr>
+        <p:style>
+          <a:lnRef idx="2">
+            <a:schemeClr val="accent1"/>
+          </a:lnRef>
+          <a:fillRef idx="0">
+            <a:schemeClr val="accent1"/>
+          </a:fillRef>
+          <a:effectRef idx="1">
+            <a:schemeClr val="accent1"/>
+          </a:effectRef>
+          <a:fontRef idx="minor">
+            <a:schemeClr val="tx1"/>
+          </a:fontRef>
+        </p:style>
+      </p:cxnSp>
+      <p:cxnSp>
+        <p:nvCxnSpPr>
+          <p:cNvPr id="19" name="Connector 18"/>
+          <p:cNvCxnSpPr/>
+          <p:nvPr/>
+        </p:nvCxnSpPr>
+        <p:spPr>
+          <a:xfrm>
+            <a:off x="3820160" y="3454400"/>
+            <a:ext cx="243840" cy="0"/>
+          </a:xfrm>
+          <a:prstGeom prst="line">
+            <a:avLst/>
+          </a:prstGeom>
+          <a:ln w="25400">
+            <a:solidFill>
+              <a:srgbClr val="475569"/>
+            </a:solidFill>
+            <a:tailEnd type="triangle" w="med" len="med"/>
+          </a:ln>
+        </p:spPr>
+        <p:style>
+          <a:lnRef idx="2">
+            <a:schemeClr val="accent1"/>
+          </a:lnRef>
+          <a:fillRef idx="0">
+            <a:schemeClr val="accent1"/>
+          </a:fillRef>
+          <a:effectRef idx="1">
+            <a:schemeClr val="accent1"/>
+          </a:effectRef>
+          <a:fontRef idx="minor">
+            <a:schemeClr val="tx1"/>
+          </a:fontRef>
+        </p:style>
+      </p:cxnSp>
+      <p:cxnSp>
+        <p:nvCxnSpPr>
+          <p:cNvPr id="20" name="Connector 19"/>
+          <p:cNvCxnSpPr/>
+          <p:nvPr/>
+        </p:nvCxnSpPr>
+        <p:spPr>
+          <a:xfrm>
+            <a:off x="5770880" y="3454400"/>
+            <a:ext cx="243840" cy="0"/>
+          </a:xfrm>
+          <a:prstGeom prst="line">
+            <a:avLst/>
+          </a:prstGeom>
+          <a:ln w="25400">
+            <a:solidFill>
+              <a:srgbClr val="475569"/>
+            </a:solidFill>
+            <a:tailEnd type="triangle" w="med" len="med"/>
+          </a:ln>
+        </p:spPr>
+        <p:style>
+          <a:lnRef idx="2">
+            <a:schemeClr val="accent1"/>
+          </a:lnRef>
+          <a:fillRef idx="0">
+            <a:schemeClr val="accent1"/>
+          </a:fillRef>
+          <a:effectRef idx="1">
+            <a:schemeClr val="accent1"/>
+          </a:effectRef>
+          <a:fontRef idx="minor">
+            <a:schemeClr val="tx1"/>
+          </a:fontRef>
+        </p:style>
+      </p:cxnSp>
+      <p:sp>
+        <p:nvSpPr>
+          <p:cNvPr id="21" name="TextBox 20"/>
+          <p:cNvSpPr txBox="1"/>
+          <p:nvPr/>
+        </p:nvSpPr>
+        <p:spPr>
+          <a:xfrm>
+            <a:off x="487680" y="609600"/>
+            <a:ext cx="5740082" cy="422656"/>
+          </a:xfrm>
+          <a:prstGeom prst="rect">
+            <a:avLst/>
+          </a:prstGeom>
+          <a:noFill/>
+        </p:spPr>
+        <p:txBody>
+          <a:bodyPr wrap="none" tIns="0" bIns="0" lIns="0" rIns="0">
+            <a:spAutoFit/>
+          </a:bodyPr>
+          <a:lstStyle/>
+          <a:p>
+            <a:pPr algn="l"/>
+            <a:r>
+              <a:rPr sz="3200" b="1">
+                <a:solidFill>
+                  <a:srgbClr val="1E3A5F"/>
+                </a:solidFill>
+                <a:latin typeface="Arial"/>
+              </a:rPr>
+              <a:t>Transformer encoder stack  (1 of 2)</a:t>
+            </a:r>
+          </a:p>
+        </p:txBody>
+      </p:sp>
+      <p:sp>
+        <p:nvSpPr>
+          <p:cNvPr id="22" name="TextBox 21"/>
+          <p:cNvSpPr txBox="1"/>
+          <p:nvPr/>
+        </p:nvSpPr>
+        <p:spPr>
+          <a:xfrm>
+            <a:off x="487680" y="1036320"/>
+            <a:ext cx="4947761" cy="211328"/>
+          </a:xfrm>
+          <a:prstGeom prst="rect">
+            <a:avLst/>
+          </a:prstGeom>
+          <a:noFill/>
+        </p:spPr>
+        <p:txBody>
+          <a:bodyPr wrap="none" tIns="0" bIns="0" lIns="0" rIns="0">
+            <a:spAutoFit/>
+          </a:bodyPr>
+          <a:lstStyle/>
+          <a:p>
+            <a:pPr algn="l"/>
+            <a:r>
+              <a:rPr sz="1600">
+                <a:solidFill>
+                  <a:srgbClr val="64748B"/>
+                </a:solidFill>
+                <a:latin typeface="Arial"/>
+              </a:rPr>
+              <a:t>Token stream to pooled representation, with one block opened up</a:t>
+            </a:r>
+          </a:p>
+        </p:txBody>
+      </p:sp>
+      <p:sp>
+        <p:nvSpPr>
+          <p:cNvPr id="23" name="TextBox 22"/>
+          <p:cNvSpPr txBox="1"/>
+          <p:nvPr/>
+        </p:nvSpPr>
+        <p:spPr>
+          <a:xfrm>
+            <a:off x="487680" y="6329680"/>
+            <a:ext cx="8168481" cy="211328"/>
+          </a:xfrm>
+          <a:prstGeom prst="rect">
+            <a:avLst/>
+          </a:prstGeom>
+          <a:noFill/>
+        </p:spPr>
+        <p:txBody>
+          <a:bodyPr wrap="none" tIns="0" bIns="0" lIns="0" rIns="0">
+            <a:spAutoFit/>
+          </a:bodyPr>
+          <a:lstStyle/>
+          <a:p>
+            <a:pPr algn="l"/>
+            <a:r>
+              <a:rPr sz="1600">
+                <a:solidFill>
+                  <a:srgbClr val="64748B"/>
+                </a:solidFill>
+                <a:latin typeface="Arial"/>
+              </a:rPr>
+              <a:t>Amber: the training-only gradient path. Arcs are residual identities. L sequence length, d model width, H heads.</a:t>
+            </a:r>
+          </a:p>
+        </p:txBody>
+      </p:sp>
+    </p:spTree>
+  </p:cSld>
+  <p:clrMapOvr>
+    <a:masterClrMapping/>
+  </p:clrMapOvr>
+</p:sld>
+</file>
+
+<file path=ppt/slides/slide2.xml><?xml version="1.0" encoding="utf-8"?>
+<p:sld xmlns:a="http://schemas.openxmlformats.org/drawingml/2006/main" xmlns:p="http://schemas.openxmlformats.org/presentationml/2006/main" xmlns:r="http://schemas.openxmlformats.org/officeDocument/2006/relationships">
+  <p:cSld>
+    <p:spTree>
+      <p:nvGrpSpPr>
+        <p:cNvPr id="1" name=""/>
+        <p:cNvGrpSpPr/>
+        <p:nvPr/>
+      </p:nvGrpSpPr>
+      <p:grpSpPr/>
+      <p:sp>
+        <p:nvSpPr>
+          <p:cNvPr id="2" name="Rectangle 1"/>
           <p:cNvSpPr/>
           <p:nvPr/>
         </p:nvSpPr>
         <p:spPr>
           <a:xfrm>
-            <a:off x="487680" y="3088640"/>
-            <a:ext cx="10810240" cy="2600960"/>
+            <a:off x="0" y="0"/>
+            <a:ext cx="12192000" cy="6858000"/>
+          </a:xfrm>
+          <a:prstGeom prst="rect">
+            <a:avLst/>
+          </a:prstGeom>
+          <a:solidFill>
+            <a:srgbClr val="FFFFFF"/>
+          </a:solidFill>
+          <a:ln>
+            <a:noFill/>
+          </a:ln>
+        </p:spPr>
+        <p:style>
+          <a:lnRef idx="1">
+            <a:schemeClr val="accent1"/>
+          </a:lnRef>
+          <a:fillRef idx="3">
+            <a:schemeClr val="accent1"/>
+          </a:fillRef>
+          <a:effectRef idx="2">
+            <a:schemeClr val="accent1"/>
+          </a:effectRef>
+          <a:fontRef idx="minor">
+            <a:schemeClr val="lt1"/>
+          </a:fontRef>
+        </p:style>
+        <p:txBody>
+          <a:bodyPr rtlCol="0" anchor="ctr"/>
+          <a:lstStyle/>
+          <a:p>
+            <a:pPr algn="ctr"/>
+          </a:p>
+        </p:txBody>
+      </p:sp>
+      <p:sp>
+        <p:nvSpPr>
+          <p:cNvPr id="3" name="Rounded Rectangle 2"/>
+          <p:cNvSpPr/>
+          <p:nvPr/>
+        </p:nvSpPr>
+        <p:spPr>
+          <a:xfrm>
+            <a:off x="487680" y="1300480"/>
+            <a:ext cx="6583680" cy="2275840"/>
           </a:xfrm>
           <a:prstGeom prst="roundRect">
             <a:avLst>
-              <a:gd name="adj" fmla="val 3125"/>
+              <a:gd name="adj" fmla="val 3571"/>
             </a:avLst>
           </a:prstGeom>
           <a:noFill/>
@@ -4138,25 +4933,25 @@
                 </a:solidFill>
                 <a:latin typeface="Arial"/>
               </a:rPr>
-              <a:t>2. Inside one block  (pre-norm residual)</a:t>
-            </a:r>
-          </a:p>
-        </p:txBody>
-      </p:sp>
-      <p:sp>
-        <p:nvSpPr>
-          <p:cNvPr id="10" name="Rounded Rectangle 9"/>
+              <a:t>2. Self-attention  (pre-norm residual)</a:t>
+            </a:r>
+          </a:p>
+        </p:txBody>
+      </p:sp>
+      <p:sp>
+        <p:nvSpPr>
+          <p:cNvPr id="4" name="Rounded Rectangle 3"/>
           <p:cNvSpPr/>
           <p:nvPr/>
         </p:nvSpPr>
         <p:spPr>
           <a:xfrm>
-            <a:off x="731520" y="3657600"/>
-            <a:ext cx="5039360" cy="1788160"/>
+            <a:off x="731520" y="1869440"/>
+            <a:ext cx="6096000" cy="1463040"/>
           </a:xfrm>
           <a:prstGeom prst="roundRect">
             <a:avLst>
-              <a:gd name="adj" fmla="val 4545"/>
+              <a:gd name="adj" fmla="val 5555"/>
             </a:avLst>
           </a:prstGeom>
           <a:noFill/>
@@ -4182,41 +4977,22 @@
           </a:fontRef>
         </p:style>
         <p:txBody>
-          <a:bodyPr rtlCol="0" anchor="t" wrap="none" lIns="0" rIns="0" tIns="182880" bIns="0"/>
-          <a:lstStyle/>
-          <a:p>
-            <a:pPr algn="l" marL="162560">
-              <a:lnSpc>
-                <a:spcPts val="1536"/>
-              </a:lnSpc>
-              <a:spcBef>
-                <a:spcPts val="0"/>
-              </a:spcBef>
-              <a:spcAft>
-                <a:spcPts val="0"/>
-              </a:spcAft>
-            </a:pPr>
-            <a:r>
-              <a:rPr sz="1600" b="1">
-                <a:solidFill>
-                  <a:srgbClr val="64748B"/>
-                </a:solidFill>
-                <a:latin typeface="Arial"/>
-              </a:rPr>
-              <a:t>Self-attention</a:t>
-            </a:r>
-          </a:p>
-        </p:txBody>
-      </p:sp>
-      <p:sp>
-        <p:nvSpPr>
-          <p:cNvPr id="11" name="Rounded Rectangle 10"/>
+          <a:bodyPr rtlCol="0" anchor="ctr"/>
+          <a:lstStyle/>
+          <a:p>
+            <a:pPr algn="ctr"/>
+          </a:p>
+        </p:txBody>
+      </p:sp>
+      <p:sp>
+        <p:nvSpPr>
+          <p:cNvPr id="5" name="Rounded Rectangle 4"/>
           <p:cNvSpPr/>
           <p:nvPr/>
         </p:nvSpPr>
         <p:spPr>
           <a:xfrm>
-            <a:off x="975360" y="4307840"/>
+            <a:off x="975360" y="2194560"/>
             <a:ext cx="1788160" cy="731520"/>
           </a:xfrm>
           <a:prstGeom prst="roundRect">
@@ -4291,21 +5067,21 @@
                 </a:solidFill>
                 <a:latin typeface="Arial"/>
               </a:rPr>
-              <a:t>(B,L,d)</a:t>
-            </a:r>
-          </a:p>
-        </p:txBody>
-      </p:sp>
-      <p:sp>
-        <p:nvSpPr>
-          <p:cNvPr id="12" name="Rounded Rectangle 11"/>
+              <a:t>(B, L, d)</a:t>
+            </a:r>
+          </a:p>
+        </p:txBody>
+      </p:sp>
+      <p:sp>
+        <p:nvSpPr>
+          <p:cNvPr id="6" name="Rounded Rectangle 5"/>
           <p:cNvSpPr/>
           <p:nvPr/>
         </p:nvSpPr>
         <p:spPr>
           <a:xfrm>
-            <a:off x="3007360" y="4226560"/>
-            <a:ext cx="1625600" cy="975360"/>
+            <a:off x="3007360" y="2113280"/>
+            <a:ext cx="2682240" cy="975360"/>
           </a:xfrm>
           <a:prstGeom prst="roundRect">
             <a:avLst>
@@ -4357,7 +5133,7 @@
                 </a:solidFill>
                 <a:latin typeface="Arial"/>
               </a:rPr>
-              <a:t>Attention</a:t>
+              <a:t>Scaled dot-product</a:t>
             </a:r>
           </a:p>
           <a:p>
@@ -4379,7 +5155,7 @@
                 </a:solidFill>
                 <a:latin typeface="Arial"/>
               </a:rPr>
-              <a:t>H heads</a:t>
+              <a:t>H heads, causal mask</a:t>
             </a:r>
           </a:p>
           <a:p>
@@ -4401,20 +5177,20 @@
                 </a:solidFill>
                 <a:latin typeface="Arial"/>
               </a:rPr>
-              <a:t>(B,H,L,L)</a:t>
-            </a:r>
-          </a:p>
-        </p:txBody>
-      </p:sp>
-      <p:sp>
-        <p:nvSpPr>
-          <p:cNvPr id="13" name="Oval 12"/>
+              <a:t>(B, H, L, L)</a:t>
+            </a:r>
+          </a:p>
+        </p:txBody>
+      </p:sp>
+      <p:sp>
+        <p:nvSpPr>
+          <p:cNvPr id="7" name="Oval 6"/>
           <p:cNvSpPr/>
           <p:nvPr/>
         </p:nvSpPr>
         <p:spPr>
           <a:xfrm>
-            <a:off x="4876800" y="4389120"/>
+            <a:off x="5933440" y="2275840"/>
             <a:ext cx="650240" cy="650240"/>
           </a:xfrm>
           <a:prstGeom prst="ellipse">
@@ -4472,24 +5248,24 @@
       </p:sp>
       <p:sp>
         <p:nvSpPr>
-          <p:cNvPr id="14" name="Rounded Rectangle 13"/>
+          <p:cNvPr id="8" name="Rounded Rectangle 7"/>
           <p:cNvSpPr/>
           <p:nvPr/>
         </p:nvSpPr>
         <p:spPr>
           <a:xfrm>
-            <a:off x="6014720" y="3738880"/>
-            <a:ext cx="5039360" cy="1544320"/>
+            <a:off x="487680" y="3820160"/>
+            <a:ext cx="6177280" cy="2275840"/>
           </a:xfrm>
           <a:prstGeom prst="roundRect">
             <a:avLst>
-              <a:gd name="adj" fmla="val 5263"/>
+              <a:gd name="adj" fmla="val 3571"/>
             </a:avLst>
           </a:prstGeom>
           <a:noFill/>
           <a:ln w="19050">
             <a:solidFill>
-              <a:srgbClr val="64748B"/>
+              <a:srgbClr val="E2E8F0"/>
             </a:solidFill>
             <a:prstDash val="dash"/>
           </a:ln>
@@ -4530,20 +5306,66 @@
                 </a:solidFill>
                 <a:latin typeface="Arial"/>
               </a:rPr>
-              <a:t>Feed-forward</a:t>
-            </a:r>
-          </a:p>
-        </p:txBody>
-      </p:sp>
-      <p:sp>
-        <p:nvSpPr>
-          <p:cNvPr id="15" name="Rounded Rectangle 14"/>
+              <a:t>3. Feed-forward  (pre-norm residual)</a:t>
+            </a:r>
+          </a:p>
+        </p:txBody>
+      </p:sp>
+      <p:sp>
+        <p:nvSpPr>
+          <p:cNvPr id="9" name="Rounded Rectangle 8"/>
           <p:cNvSpPr/>
           <p:nvPr/>
         </p:nvSpPr>
         <p:spPr>
           <a:xfrm>
-            <a:off x="6258560" y="4307840"/>
+            <a:off x="731520" y="4389120"/>
+            <a:ext cx="5689600" cy="1463040"/>
+          </a:xfrm>
+          <a:prstGeom prst="roundRect">
+            <a:avLst>
+              <a:gd name="adj" fmla="val 5555"/>
+            </a:avLst>
+          </a:prstGeom>
+          <a:noFill/>
+          <a:ln w="19050">
+            <a:solidFill>
+              <a:srgbClr val="64748B"/>
+            </a:solidFill>
+            <a:prstDash val="dash"/>
+          </a:ln>
+        </p:spPr>
+        <p:style>
+          <a:lnRef idx="1">
+            <a:schemeClr val="accent1"/>
+          </a:lnRef>
+          <a:fillRef idx="3">
+            <a:schemeClr val="accent1"/>
+          </a:fillRef>
+          <a:effectRef idx="2">
+            <a:schemeClr val="accent1"/>
+          </a:effectRef>
+          <a:fontRef idx="minor">
+            <a:schemeClr val="lt1"/>
+          </a:fontRef>
+        </p:style>
+        <p:txBody>
+          <a:bodyPr rtlCol="0" anchor="ctr"/>
+          <a:lstStyle/>
+          <a:p>
+            <a:pPr algn="ctr"/>
+          </a:p>
+        </p:txBody>
+      </p:sp>
+      <p:sp>
+        <p:nvSpPr>
+          <p:cNvPr id="10" name="Rounded Rectangle 9"/>
+          <p:cNvSpPr/>
+          <p:nvPr/>
+        </p:nvSpPr>
+        <p:spPr>
+          <a:xfrm>
+            <a:off x="975360" y="4714240"/>
             <a:ext cx="1788160" cy="731520"/>
           </a:xfrm>
           <a:prstGeom prst="roundRect">
@@ -4618,25 +5440,25 @@
                 </a:solidFill>
                 <a:latin typeface="Arial"/>
               </a:rPr>
-              <a:t>(B,L,d)</a:t>
-            </a:r>
-          </a:p>
-        </p:txBody>
-      </p:sp>
-      <p:sp>
-        <p:nvSpPr>
-          <p:cNvPr id="16" name="Rounded Rectangle 15"/>
+              <a:t>(B, L, d)</a:t>
+            </a:r>
+          </a:p>
+        </p:txBody>
+      </p:sp>
+      <p:sp>
+        <p:nvSpPr>
+          <p:cNvPr id="11" name="Rounded Rectangle 10"/>
           <p:cNvSpPr/>
           <p:nvPr/>
         </p:nvSpPr>
         <p:spPr>
           <a:xfrm>
-            <a:off x="8290560" y="4307840"/>
-            <a:ext cx="1625600" cy="731520"/>
+            <a:off x="3007360" y="4632960"/>
+            <a:ext cx="2275840" cy="975360"/>
           </a:xfrm>
           <a:prstGeom prst="roundRect">
             <a:avLst>
-              <a:gd name="adj" fmla="val 11111"/>
+              <a:gd name="adj" fmla="val 8333"/>
             </a:avLst>
           </a:prstGeom>
           <a:solidFill>
@@ -4684,7 +5506,7 @@
                 </a:solidFill>
                 <a:latin typeface="Arial"/>
               </a:rPr>
-              <a:t>Linear 4d</a:t>
+              <a:t>Linear d to 4d</a:t>
             </a:r>
           </a:p>
           <a:p>
@@ -4693,7 +5515,7 @@
                 <a:spcPts val="1536"/>
               </a:lnSpc>
               <a:spcBef>
-                <a:spcPts val="352"/>
+                <a:spcPts val="192"/>
               </a:spcBef>
               <a:spcAft>
                 <a:spcPts val="0"/>
@@ -4706,20 +5528,42 @@
                 </a:solidFill>
                 <a:latin typeface="Arial"/>
               </a:rPr>
-              <a:t>(B,L,4d)</a:t>
-            </a:r>
-          </a:p>
-        </p:txBody>
-      </p:sp>
-      <p:sp>
-        <p:nvSpPr>
-          <p:cNvPr id="17" name="Oval 16"/>
+              <a:t>GELU, dropout 0.1</a:t>
+            </a:r>
+          </a:p>
+          <a:p>
+            <a:pPr algn="l" marL="162560">
+              <a:lnSpc>
+                <a:spcPts val="1536"/>
+              </a:lnSpc>
+              <a:spcBef>
+                <a:spcPts val="544"/>
+              </a:spcBef>
+              <a:spcAft>
+                <a:spcPts val="0"/>
+              </a:spcAft>
+            </a:pPr>
+            <a:r>
+              <a:rPr sz="1600">
+                <a:solidFill>
+                  <a:srgbClr val="64748B"/>
+                </a:solidFill>
+                <a:latin typeface="Arial"/>
+              </a:rPr>
+              <a:t>(B, L, 4d)</a:t>
+            </a:r>
+          </a:p>
+        </p:txBody>
+      </p:sp>
+      <p:sp>
+        <p:nvSpPr>
+          <p:cNvPr id="12" name="Oval 11"/>
           <p:cNvSpPr/>
           <p:nvPr/>
         </p:nvSpPr>
         <p:spPr>
           <a:xfrm>
-            <a:off x="10160000" y="4307840"/>
+            <a:off x="5527040" y="4795520"/>
             <a:ext cx="650240" cy="650240"/>
           </a:xfrm>
           <a:prstGeom prst="ellipse">
@@ -4777,14 +5621,84 @@
       </p:sp>
       <p:cxnSp>
         <p:nvCxnSpPr>
-          <p:cNvPr id="18" name="Connector 17"/>
+          <p:cNvPr id="13" name="Connector 12"/>
           <p:cNvCxnSpPr/>
           <p:nvPr/>
         </p:nvCxnSpPr>
         <p:spPr>
           <a:xfrm>
-            <a:off x="2600960" y="2235200"/>
-            <a:ext cx="243840" cy="0"/>
+            <a:off x="2763520" y="2560320"/>
+            <a:ext cx="81280" cy="0"/>
+          </a:xfrm>
+          <a:prstGeom prst="line">
+            <a:avLst/>
+          </a:prstGeom>
+          <a:ln w="25400">
+            <a:solidFill>
+              <a:srgbClr val="475569"/>
+            </a:solidFill>
+          </a:ln>
+        </p:spPr>
+        <p:style>
+          <a:lnRef idx="2">
+            <a:schemeClr val="accent1"/>
+          </a:lnRef>
+          <a:fillRef idx="0">
+            <a:schemeClr val="accent1"/>
+          </a:fillRef>
+          <a:effectRef idx="1">
+            <a:schemeClr val="accent1"/>
+          </a:effectRef>
+          <a:fontRef idx="minor">
+            <a:schemeClr val="tx1"/>
+          </a:fontRef>
+        </p:style>
+      </p:cxnSp>
+      <p:cxnSp>
+        <p:nvCxnSpPr>
+          <p:cNvPr id="14" name="Connector 13"/>
+          <p:cNvCxnSpPr/>
+          <p:nvPr/>
+        </p:nvCxnSpPr>
+        <p:spPr>
+          <a:xfrm>
+            <a:off x="2844800" y="2560320"/>
+            <a:ext cx="0" cy="40640"/>
+          </a:xfrm>
+          <a:prstGeom prst="line">
+            <a:avLst/>
+          </a:prstGeom>
+          <a:ln w="25400">
+            <a:solidFill>
+              <a:srgbClr val="475569"/>
+            </a:solidFill>
+          </a:ln>
+        </p:spPr>
+        <p:style>
+          <a:lnRef idx="2">
+            <a:schemeClr val="accent1"/>
+          </a:lnRef>
+          <a:fillRef idx="0">
+            <a:schemeClr val="accent1"/>
+          </a:fillRef>
+          <a:effectRef idx="1">
+            <a:schemeClr val="accent1"/>
+          </a:effectRef>
+          <a:fontRef idx="minor">
+            <a:schemeClr val="tx1"/>
+          </a:fontRef>
+        </p:style>
+      </p:cxnSp>
+      <p:cxnSp>
+        <p:nvCxnSpPr>
+          <p:cNvPr id="15" name="Connector 14"/>
+          <p:cNvCxnSpPr/>
+          <p:nvPr/>
+        </p:nvCxnSpPr>
+        <p:spPr>
+          <a:xfrm>
+            <a:off x="2844800" y="2600960"/>
+            <a:ext cx="162560" cy="0"/>
           </a:xfrm>
           <a:prstGeom prst="line">
             <a:avLst/>
@@ -4794,6 +5708,112 @@
               <a:srgbClr val="475569"/>
             </a:solidFill>
             <a:tailEnd type="triangle" w="med" len="med"/>
+          </a:ln>
+        </p:spPr>
+        <p:style>
+          <a:lnRef idx="2">
+            <a:schemeClr val="accent1"/>
+          </a:lnRef>
+          <a:fillRef idx="0">
+            <a:schemeClr val="accent1"/>
+          </a:fillRef>
+          <a:effectRef idx="1">
+            <a:schemeClr val="accent1"/>
+          </a:effectRef>
+          <a:fontRef idx="minor">
+            <a:schemeClr val="tx1"/>
+          </a:fontRef>
+        </p:style>
+      </p:cxnSp>
+      <p:cxnSp>
+        <p:nvCxnSpPr>
+          <p:cNvPr id="16" name="Connector 15"/>
+          <p:cNvCxnSpPr/>
+          <p:nvPr/>
+        </p:nvCxnSpPr>
+        <p:spPr>
+          <a:xfrm>
+            <a:off x="5689600" y="2600960"/>
+            <a:ext cx="243840" cy="0"/>
+          </a:xfrm>
+          <a:prstGeom prst="line">
+            <a:avLst/>
+          </a:prstGeom>
+          <a:ln w="25400">
+            <a:solidFill>
+              <a:srgbClr val="475569"/>
+            </a:solidFill>
+            <a:tailEnd type="triangle" w="med" len="med"/>
+          </a:ln>
+        </p:spPr>
+        <p:style>
+          <a:lnRef idx="2">
+            <a:schemeClr val="accent1"/>
+          </a:lnRef>
+          <a:fillRef idx="0">
+            <a:schemeClr val="accent1"/>
+          </a:fillRef>
+          <a:effectRef idx="1">
+            <a:schemeClr val="accent1"/>
+          </a:effectRef>
+          <a:fontRef idx="minor">
+            <a:schemeClr val="tx1"/>
+          </a:fontRef>
+        </p:style>
+      </p:cxnSp>
+      <p:cxnSp>
+        <p:nvCxnSpPr>
+          <p:cNvPr id="17" name="Connector 16"/>
+          <p:cNvCxnSpPr/>
+          <p:nvPr/>
+        </p:nvCxnSpPr>
+        <p:spPr>
+          <a:xfrm>
+            <a:off x="2763520" y="5080000"/>
+            <a:ext cx="81280" cy="0"/>
+          </a:xfrm>
+          <a:prstGeom prst="line">
+            <a:avLst/>
+          </a:prstGeom>
+          <a:ln w="25400">
+            <a:solidFill>
+              <a:srgbClr val="475569"/>
+            </a:solidFill>
+          </a:ln>
+        </p:spPr>
+        <p:style>
+          <a:lnRef idx="2">
+            <a:schemeClr val="accent1"/>
+          </a:lnRef>
+          <a:fillRef idx="0">
+            <a:schemeClr val="accent1"/>
+          </a:fillRef>
+          <a:effectRef idx="1">
+            <a:schemeClr val="accent1"/>
+          </a:effectRef>
+          <a:fontRef idx="minor">
+            <a:schemeClr val="tx1"/>
+          </a:fontRef>
+        </p:style>
+      </p:cxnSp>
+      <p:cxnSp>
+        <p:nvCxnSpPr>
+          <p:cNvPr id="18" name="Connector 17"/>
+          <p:cNvCxnSpPr/>
+          <p:nvPr/>
+        </p:nvCxnSpPr>
+        <p:spPr>
+          <a:xfrm>
+            <a:off x="2844800" y="5080000"/>
+            <a:ext cx="0" cy="40640"/>
+          </a:xfrm>
+          <a:prstGeom prst="line">
+            <a:avLst/>
+          </a:prstGeom>
+          <a:ln w="25400">
+            <a:solidFill>
+              <a:srgbClr val="475569"/>
+            </a:solidFill>
           </a:ln>
         </p:spPr>
         <p:style>
@@ -4819,8 +5839,8 @@
         </p:nvCxnSpPr>
         <p:spPr>
           <a:xfrm>
-            <a:off x="6746240" y="2235200"/>
-            <a:ext cx="243840" cy="0"/>
+            <a:off x="2844800" y="5120640"/>
+            <a:ext cx="162560" cy="0"/>
           </a:xfrm>
           <a:prstGeom prst="line">
             <a:avLst/>
@@ -4855,7 +5875,7 @@
         </p:nvCxnSpPr>
         <p:spPr>
           <a:xfrm>
-            <a:off x="8696960" y="2235200"/>
+            <a:off x="5283200" y="5120640"/>
             <a:ext cx="243840" cy="0"/>
           </a:xfrm>
           <a:prstGeom prst="line">
@@ -4890,9 +5910,9 @@
           <p:nvPr/>
         </p:nvCxnSpPr>
         <p:spPr>
-          <a:xfrm>
-            <a:off x="2763520" y="4673600"/>
-            <a:ext cx="81280" cy="0"/>
+          <a:xfrm flipV="1">
+            <a:off x="1869440" y="1991360"/>
+            <a:ext cx="0" cy="203200"/>
           </a:xfrm>
           <a:prstGeom prst="line">
             <a:avLst/>
@@ -4926,8 +5946,8 @@
         </p:nvCxnSpPr>
         <p:spPr>
           <a:xfrm>
-            <a:off x="2844800" y="4673600"/>
-            <a:ext cx="0" cy="40640"/>
+            <a:off x="1869440" y="1991360"/>
+            <a:ext cx="4389120" cy="0"/>
           </a:xfrm>
           <a:prstGeom prst="line">
             <a:avLst/>
@@ -4961,8 +5981,8 @@
         </p:nvCxnSpPr>
         <p:spPr>
           <a:xfrm>
-            <a:off x="2844800" y="4714240"/>
-            <a:ext cx="162560" cy="0"/>
+            <a:off x="6258560" y="1991360"/>
+            <a:ext cx="0" cy="284480"/>
           </a:xfrm>
           <a:prstGeom prst="line">
             <a:avLst/>
@@ -4996,9 +6016,9 @@
           <p:nvPr/>
         </p:nvCxnSpPr>
         <p:spPr>
-          <a:xfrm>
-            <a:off x="4632960" y="4714240"/>
-            <a:ext cx="243840" cy="0"/>
+          <a:xfrm flipV="1">
+            <a:off x="1869440" y="4511040"/>
+            <a:ext cx="0" cy="203200"/>
           </a:xfrm>
           <a:prstGeom prst="line">
             <a:avLst/>
@@ -5007,7 +6027,6 @@
             <a:solidFill>
               <a:srgbClr val="475569"/>
             </a:solidFill>
-            <a:tailEnd type="triangle" w="med" len="med"/>
           </a:ln>
         </p:spPr>
         <p:style>
@@ -5033,8 +6052,8 @@
         </p:nvCxnSpPr>
         <p:spPr>
           <a:xfrm>
-            <a:off x="8046720" y="4673600"/>
-            <a:ext cx="243840" cy="0"/>
+            <a:off x="1869440" y="4511040"/>
+            <a:ext cx="3982720" cy="0"/>
           </a:xfrm>
           <a:prstGeom prst="line">
             <a:avLst/>
@@ -5043,7 +6062,6 @@
             <a:solidFill>
               <a:srgbClr val="475569"/>
             </a:solidFill>
-            <a:tailEnd type="triangle" w="med" len="med"/>
           </a:ln>
         </p:spPr>
         <p:style>
@@ -5069,8 +6087,8 @@
         </p:nvCxnSpPr>
         <p:spPr>
           <a:xfrm>
-            <a:off x="9916160" y="4673600"/>
-            <a:ext cx="81280" cy="0"/>
+            <a:off x="5852160" y="4511040"/>
+            <a:ext cx="0" cy="284480"/>
           </a:xfrm>
           <a:prstGeom prst="line">
             <a:avLst/>
@@ -5079,6 +6097,7 @@
             <a:solidFill>
               <a:srgbClr val="475569"/>
             </a:solidFill>
+            <a:tailEnd type="triangle" w="med" len="med"/>
           </a:ln>
         </p:spPr>
         <p:style>
@@ -5103,9 +6122,9 @@
           <p:nvPr/>
         </p:nvCxnSpPr>
         <p:spPr>
-          <a:xfrm flipV="1">
-            <a:off x="9997440" y="4632960"/>
-            <a:ext cx="0" cy="40640"/>
+          <a:xfrm>
+            <a:off x="6258560" y="2926080"/>
+            <a:ext cx="0" cy="894080"/>
           </a:xfrm>
           <a:prstGeom prst="line">
             <a:avLst/>
@@ -5138,9 +6157,9 @@
           <p:nvPr/>
         </p:nvCxnSpPr>
         <p:spPr>
-          <a:xfrm>
-            <a:off x="9997440" y="4632960"/>
-            <a:ext cx="162560" cy="0"/>
+          <a:xfrm flipH="1">
+            <a:off x="1869440" y="3820160"/>
+            <a:ext cx="4389120" cy="0"/>
           </a:xfrm>
           <a:prstGeom prst="line">
             <a:avLst/>
@@ -5149,7 +6168,6 @@
             <a:solidFill>
               <a:srgbClr val="475569"/>
             </a:solidFill>
-            <a:tailEnd type="triangle" w="med" len="med"/>
           </a:ln>
         </p:spPr>
         <p:style>
@@ -5174,79 +6192,9 @@
           <p:nvPr/>
         </p:nvCxnSpPr>
         <p:spPr>
-          <a:xfrm flipV="1">
-            <a:off x="1869440" y="3901440"/>
-            <a:ext cx="0" cy="406400"/>
-          </a:xfrm>
-          <a:prstGeom prst="line">
-            <a:avLst/>
-          </a:prstGeom>
-          <a:ln w="25400">
-            <a:solidFill>
-              <a:srgbClr val="475569"/>
-            </a:solidFill>
-          </a:ln>
-        </p:spPr>
-        <p:style>
-          <a:lnRef idx="2">
-            <a:schemeClr val="accent1"/>
-          </a:lnRef>
-          <a:fillRef idx="0">
-            <a:schemeClr val="accent1"/>
-          </a:fillRef>
-          <a:effectRef idx="1">
-            <a:schemeClr val="accent1"/>
-          </a:effectRef>
-          <a:fontRef idx="minor">
-            <a:schemeClr val="tx1"/>
-          </a:fontRef>
-        </p:style>
-      </p:cxnSp>
-      <p:cxnSp>
-        <p:nvCxnSpPr>
-          <p:cNvPr id="30" name="Connector 29"/>
-          <p:cNvCxnSpPr/>
-          <p:nvPr/>
-        </p:nvCxnSpPr>
-        <p:spPr>
-          <a:xfrm>
-            <a:off x="1869440" y="3901440"/>
-            <a:ext cx="3332480" cy="0"/>
-          </a:xfrm>
-          <a:prstGeom prst="line">
-            <a:avLst/>
-          </a:prstGeom>
-          <a:ln w="25400">
-            <a:solidFill>
-              <a:srgbClr val="475569"/>
-            </a:solidFill>
-          </a:ln>
-        </p:spPr>
-        <p:style>
-          <a:lnRef idx="2">
-            <a:schemeClr val="accent1"/>
-          </a:lnRef>
-          <a:fillRef idx="0">
-            <a:schemeClr val="accent1"/>
-          </a:fillRef>
-          <a:effectRef idx="1">
-            <a:schemeClr val="accent1"/>
-          </a:effectRef>
-          <a:fontRef idx="minor">
-            <a:schemeClr val="tx1"/>
-          </a:fontRef>
-        </p:style>
-      </p:cxnSp>
-      <p:cxnSp>
-        <p:nvCxnSpPr>
-          <p:cNvPr id="31" name="Connector 30"/>
-          <p:cNvCxnSpPr/>
-          <p:nvPr/>
-        </p:nvCxnSpPr>
-        <p:spPr>
-          <a:xfrm>
-            <a:off x="5201920" y="3901440"/>
-            <a:ext cx="0" cy="487680"/>
+          <a:xfrm>
+            <a:off x="1869440" y="3820160"/>
+            <a:ext cx="0" cy="894080"/>
           </a:xfrm>
           <a:prstGeom prst="line">
             <a:avLst/>
@@ -5273,337 +6221,16 @@
           </a:fontRef>
         </p:style>
       </p:cxnSp>
-      <p:cxnSp>
-        <p:nvCxnSpPr>
-          <p:cNvPr id="32" name="Connector 31"/>
-          <p:cNvCxnSpPr/>
-          <p:nvPr/>
-        </p:nvCxnSpPr>
-        <p:spPr>
-          <a:xfrm flipV="1">
-            <a:off x="7152640" y="3901440"/>
-            <a:ext cx="0" cy="406400"/>
-          </a:xfrm>
-          <a:prstGeom prst="line">
-            <a:avLst/>
-          </a:prstGeom>
-          <a:ln w="25400">
-            <a:solidFill>
-              <a:srgbClr val="475569"/>
-            </a:solidFill>
-          </a:ln>
-        </p:spPr>
-        <p:style>
-          <a:lnRef idx="2">
-            <a:schemeClr val="accent1"/>
-          </a:lnRef>
-          <a:fillRef idx="0">
-            <a:schemeClr val="accent1"/>
-          </a:fillRef>
-          <a:effectRef idx="1">
-            <a:schemeClr val="accent1"/>
-          </a:effectRef>
-          <a:fontRef idx="minor">
-            <a:schemeClr val="tx1"/>
-          </a:fontRef>
-        </p:style>
-      </p:cxnSp>
-      <p:cxnSp>
-        <p:nvCxnSpPr>
-          <p:cNvPr id="33" name="Connector 32"/>
-          <p:cNvCxnSpPr/>
-          <p:nvPr/>
-        </p:nvCxnSpPr>
-        <p:spPr>
-          <a:xfrm>
-            <a:off x="7152640" y="3901440"/>
-            <a:ext cx="3332480" cy="0"/>
-          </a:xfrm>
-          <a:prstGeom prst="line">
-            <a:avLst/>
-          </a:prstGeom>
-          <a:ln w="25400">
-            <a:solidFill>
-              <a:srgbClr val="475569"/>
-            </a:solidFill>
-          </a:ln>
-        </p:spPr>
-        <p:style>
-          <a:lnRef idx="2">
-            <a:schemeClr val="accent1"/>
-          </a:lnRef>
-          <a:fillRef idx="0">
-            <a:schemeClr val="accent1"/>
-          </a:fillRef>
-          <a:effectRef idx="1">
-            <a:schemeClr val="accent1"/>
-          </a:effectRef>
-          <a:fontRef idx="minor">
-            <a:schemeClr val="tx1"/>
-          </a:fontRef>
-        </p:style>
-      </p:cxnSp>
-      <p:cxnSp>
-        <p:nvCxnSpPr>
-          <p:cNvPr id="34" name="Connector 33"/>
-          <p:cNvCxnSpPr/>
-          <p:nvPr/>
-        </p:nvCxnSpPr>
-        <p:spPr>
-          <a:xfrm>
-            <a:off x="10485120" y="3901440"/>
-            <a:ext cx="0" cy="406400"/>
-          </a:xfrm>
-          <a:prstGeom prst="line">
-            <a:avLst/>
-          </a:prstGeom>
-          <a:ln w="25400">
-            <a:solidFill>
-              <a:srgbClr val="475569"/>
-            </a:solidFill>
-            <a:tailEnd type="triangle" w="med" len="med"/>
-          </a:ln>
-        </p:spPr>
-        <p:style>
-          <a:lnRef idx="2">
-            <a:schemeClr val="accent1"/>
-          </a:lnRef>
-          <a:fillRef idx="0">
-            <a:schemeClr val="accent1"/>
-          </a:fillRef>
-          <a:effectRef idx="1">
-            <a:schemeClr val="accent1"/>
-          </a:effectRef>
-          <a:fontRef idx="minor">
-            <a:schemeClr val="tx1"/>
-          </a:fontRef>
-        </p:style>
-      </p:cxnSp>
-      <p:cxnSp>
-        <p:nvCxnSpPr>
-          <p:cNvPr id="35" name="Connector 34"/>
-          <p:cNvCxnSpPr/>
-          <p:nvPr/>
-        </p:nvCxnSpPr>
-        <p:spPr>
-          <a:xfrm>
-            <a:off x="5527040" y="4714240"/>
-            <a:ext cx="325120" cy="0"/>
-          </a:xfrm>
-          <a:prstGeom prst="line">
-            <a:avLst/>
-          </a:prstGeom>
-          <a:ln w="25400">
-            <a:solidFill>
-              <a:srgbClr val="475569"/>
-            </a:solidFill>
-          </a:ln>
-        </p:spPr>
-        <p:style>
-          <a:lnRef idx="2">
-            <a:schemeClr val="accent1"/>
-          </a:lnRef>
-          <a:fillRef idx="0">
-            <a:schemeClr val="accent1"/>
-          </a:fillRef>
-          <a:effectRef idx="1">
-            <a:schemeClr val="accent1"/>
-          </a:effectRef>
-          <a:fontRef idx="minor">
-            <a:schemeClr val="tx1"/>
-          </a:fontRef>
-        </p:style>
-      </p:cxnSp>
-      <p:cxnSp>
-        <p:nvCxnSpPr>
-          <p:cNvPr id="36" name="Connector 35"/>
-          <p:cNvCxnSpPr/>
-          <p:nvPr/>
-        </p:nvCxnSpPr>
-        <p:spPr>
-          <a:xfrm flipV="1">
-            <a:off x="5852160" y="4673600"/>
-            <a:ext cx="0" cy="40640"/>
-          </a:xfrm>
-          <a:prstGeom prst="line">
-            <a:avLst/>
-          </a:prstGeom>
-          <a:ln w="25400">
-            <a:solidFill>
-              <a:srgbClr val="475569"/>
-            </a:solidFill>
-          </a:ln>
-        </p:spPr>
-        <p:style>
-          <a:lnRef idx="2">
-            <a:schemeClr val="accent1"/>
-          </a:lnRef>
-          <a:fillRef idx="0">
-            <a:schemeClr val="accent1"/>
-          </a:fillRef>
-          <a:effectRef idx="1">
-            <a:schemeClr val="accent1"/>
-          </a:effectRef>
-          <a:fontRef idx="minor">
-            <a:schemeClr val="tx1"/>
-          </a:fontRef>
-        </p:style>
-      </p:cxnSp>
-      <p:cxnSp>
-        <p:nvCxnSpPr>
-          <p:cNvPr id="37" name="Connector 36"/>
-          <p:cNvCxnSpPr/>
-          <p:nvPr/>
-        </p:nvCxnSpPr>
-        <p:spPr>
-          <a:xfrm>
-            <a:off x="5852160" y="4673600"/>
-            <a:ext cx="406400" cy="0"/>
-          </a:xfrm>
-          <a:prstGeom prst="line">
-            <a:avLst/>
-          </a:prstGeom>
-          <a:ln w="25400">
-            <a:solidFill>
-              <a:srgbClr val="475569"/>
-            </a:solidFill>
-            <a:tailEnd type="triangle" w="med" len="med"/>
-          </a:ln>
-        </p:spPr>
-        <p:style>
-          <a:lnRef idx="2">
-            <a:schemeClr val="accent1"/>
-          </a:lnRef>
-          <a:fillRef idx="0">
-            <a:schemeClr val="accent1"/>
-          </a:fillRef>
-          <a:effectRef idx="1">
-            <a:schemeClr val="accent1"/>
-          </a:effectRef>
-          <a:fontRef idx="minor">
-            <a:schemeClr val="tx1"/>
-          </a:fontRef>
-        </p:style>
-      </p:cxnSp>
-      <p:cxnSp>
-        <p:nvCxnSpPr>
-          <p:cNvPr id="38" name="Connector 37"/>
-          <p:cNvCxnSpPr/>
-          <p:nvPr/>
-        </p:nvCxnSpPr>
-        <p:spPr>
-          <a:xfrm>
-            <a:off x="10038080" y="2600960"/>
-            <a:ext cx="0" cy="3007360"/>
-          </a:xfrm>
-          <a:prstGeom prst="line">
-            <a:avLst/>
-          </a:prstGeom>
-          <a:ln w="25400">
-            <a:solidFill>
-              <a:srgbClr val="B45309"/>
-            </a:solidFill>
-            <a:prstDash val="dash"/>
-          </a:ln>
-        </p:spPr>
-        <p:style>
-          <a:lnRef idx="2">
-            <a:schemeClr val="accent1"/>
-          </a:lnRef>
-          <a:fillRef idx="0">
-            <a:schemeClr val="accent1"/>
-          </a:fillRef>
-          <a:effectRef idx="1">
-            <a:schemeClr val="accent1"/>
-          </a:effectRef>
-          <a:fontRef idx="minor">
-            <a:schemeClr val="tx1"/>
-          </a:fontRef>
-        </p:style>
-      </p:cxnSp>
-      <p:cxnSp>
-        <p:nvCxnSpPr>
-          <p:cNvPr id="39" name="Connector 38"/>
-          <p:cNvCxnSpPr/>
-          <p:nvPr/>
-        </p:nvCxnSpPr>
-        <p:spPr>
-          <a:xfrm flipH="1">
-            <a:off x="3820160" y="5608320"/>
-            <a:ext cx="6217920" cy="0"/>
-          </a:xfrm>
-          <a:prstGeom prst="line">
-            <a:avLst/>
-          </a:prstGeom>
-          <a:ln w="25400">
-            <a:solidFill>
-              <a:srgbClr val="B45309"/>
-            </a:solidFill>
-            <a:prstDash val="dash"/>
-          </a:ln>
-        </p:spPr>
-        <p:style>
-          <a:lnRef idx="2">
-            <a:schemeClr val="accent1"/>
-          </a:lnRef>
-          <a:fillRef idx="0">
-            <a:schemeClr val="accent1"/>
-          </a:fillRef>
-          <a:effectRef idx="1">
-            <a:schemeClr val="accent1"/>
-          </a:effectRef>
-          <a:fontRef idx="minor">
-            <a:schemeClr val="tx1"/>
-          </a:fontRef>
-        </p:style>
-      </p:cxnSp>
-      <p:cxnSp>
-        <p:nvCxnSpPr>
-          <p:cNvPr id="40" name="Connector 39"/>
-          <p:cNvCxnSpPr/>
-          <p:nvPr/>
-        </p:nvCxnSpPr>
-        <p:spPr>
-          <a:xfrm flipV="1">
-            <a:off x="3820160" y="5201920"/>
-            <a:ext cx="0" cy="406400"/>
-          </a:xfrm>
-          <a:prstGeom prst="line">
-            <a:avLst/>
-          </a:prstGeom>
-          <a:ln w="25400">
-            <a:solidFill>
-              <a:srgbClr val="B45309"/>
-            </a:solidFill>
-            <a:prstDash val="dash"/>
-            <a:tailEnd type="triangle" w="med" len="med"/>
-          </a:ln>
-        </p:spPr>
-        <p:style>
-          <a:lnRef idx="2">
-            <a:schemeClr val="accent1"/>
-          </a:lnRef>
-          <a:fillRef idx="0">
-            <a:schemeClr val="accent1"/>
-          </a:fillRef>
-          <a:effectRef idx="1">
-            <a:schemeClr val="accent1"/>
-          </a:effectRef>
-          <a:fontRef idx="minor">
-            <a:schemeClr val="tx1"/>
-          </a:fontRef>
-        </p:style>
-      </p:cxnSp>
-      <p:sp>
-        <p:nvSpPr>
-          <p:cNvPr id="41" name="TextBox 40"/>
+      <p:sp>
+        <p:nvSpPr>
+          <p:cNvPr id="30" name="TextBox 29"/>
           <p:cNvSpPr txBox="1"/>
           <p:nvPr/>
         </p:nvSpPr>
         <p:spPr>
           <a:xfrm>
             <a:off x="487680" y="609600"/>
-            <a:ext cx="4470082" cy="422656"/>
+            <a:ext cx="5740082" cy="422656"/>
           </a:xfrm>
           <a:prstGeom prst="rect">
             <a:avLst/>
@@ -5624,14 +6251,14 @@
                 </a:solidFill>
                 <a:latin typeface="Arial"/>
               </a:rPr>
-              <a:t>Transformer encoder stack</a:t>
-            </a:r>
-          </a:p>
-        </p:txBody>
-      </p:sp>
-      <p:sp>
-        <p:nvSpPr>
-          <p:cNvPr id="42" name="TextBox 41"/>
+              <a:t>Transformer encoder stack  (2 of 2)</a:t>
+            </a:r>
+          </a:p>
+        </p:txBody>
+      </p:sp>
+      <p:sp>
+        <p:nvSpPr>
+          <p:cNvPr id="31" name="TextBox 30"/>
           <p:cNvSpPr txBox="1"/>
           <p:nvPr/>
         </p:nvSpPr>
@@ -5666,7 +6293,7 @@
       </p:sp>
       <p:sp>
         <p:nvSpPr>
-          <p:cNvPr id="43" name="TextBox 42"/>
+          <p:cNvPr id="32" name="TextBox 31"/>
           <p:cNvSpPr txBox="1"/>
           <p:nvPr/>
         </p:nvSpPr>

--- a/examples/architecture-diagram/architecture.pptx
+++ b/examples/architecture-diagram/architecture.pptx
@@ -3630,12 +3630,12 @@
         </p:nvSpPr>
         <p:spPr>
           <a:xfrm>
-            <a:off x="487680" y="1300480"/>
-            <a:ext cx="9591040" cy="2763520"/>
+            <a:off x="487680" y="1950720"/>
+            <a:ext cx="11135360" cy="3576320"/>
           </a:xfrm>
           <a:prstGeom prst="roundRect">
             <a:avLst>
-              <a:gd name="adj" fmla="val 2941"/>
+              <a:gd name="adj" fmla="val 2272"/>
             </a:avLst>
           </a:prstGeom>
           <a:noFill/>
@@ -3661,12 +3661,12 @@
           </a:fontRef>
         </p:style>
         <p:txBody>
-          <a:bodyPr rtlCol="0" anchor="t" wrap="none" lIns="0" rIns="0" tIns="182880" bIns="0"/>
+          <a:bodyPr rtlCol="0" anchor="t" wrap="none" lIns="0" rIns="0" tIns="143256" bIns="0"/>
           <a:lstStyle/>
           <a:p>
             <a:pPr algn="l" marL="162560">
               <a:lnSpc>
-                <a:spcPts val="1536"/>
+                <a:spcPts val="2035"/>
               </a:lnSpc>
               <a:spcBef>
                 <a:spcPts val="0"/>
@@ -3676,7 +3676,7 @@
               </a:spcAft>
             </a:pPr>
             <a:r>
-              <a:rPr sz="1600" b="1">
+              <a:rPr sz="2120" b="1">
                 <a:solidFill>
                   <a:srgbClr val="64748B"/>
                 </a:solidFill>
@@ -3695,12 +3695,12 @@
         </p:nvSpPr>
         <p:spPr>
           <a:xfrm>
-            <a:off x="731520" y="1950720"/>
-            <a:ext cx="1625600" cy="731520"/>
+            <a:off x="812800" y="2763520"/>
+            <a:ext cx="2113280" cy="975360"/>
           </a:xfrm>
           <a:prstGeom prst="roundRect">
             <a:avLst>
-              <a:gd name="adj" fmla="val 11111"/>
+              <a:gd name="adj" fmla="val 8333"/>
             </a:avLst>
           </a:prstGeom>
           <a:solidFill>
@@ -3727,12 +3727,12 @@
           </a:fontRef>
         </p:style>
         <p:txBody>
-          <a:bodyPr rtlCol="0" anchor="t" wrap="none" lIns="0" rIns="0" tIns="208280" bIns="0"/>
-          <a:lstStyle/>
-          <a:p>
-            <a:pPr algn="l" marL="162560">
+          <a:bodyPr rtlCol="0" anchor="t" wrap="none" lIns="0" rIns="0" tIns="262890" bIns="0"/>
+          <a:lstStyle/>
+          <a:p>
+            <a:pPr algn="l" marL="215392">
               <a:lnSpc>
-                <a:spcPts val="1728"/>
+                <a:spcPts val="2294"/>
               </a:lnSpc>
               <a:spcBef>
                 <a:spcPts val="0"/>
@@ -3742,7 +3742,7 @@
               </a:spcAft>
             </a:pPr>
             <a:r>
-              <a:rPr sz="1800" b="1">
+              <a:rPr sz="2390" b="1">
                 <a:solidFill>
                   <a:srgbClr val="374151"/>
                 </a:solidFill>
@@ -3752,19 +3752,19 @@
             </a:r>
           </a:p>
           <a:p>
-            <a:pPr algn="l" marL="162560">
+            <a:pPr algn="l" marL="215392">
               <a:lnSpc>
-                <a:spcPts val="1536"/>
+                <a:spcPts val="2035"/>
               </a:lnSpc>
               <a:spcBef>
-                <a:spcPts val="352"/>
+                <a:spcPts val="425"/>
               </a:spcBef>
               <a:spcAft>
                 <a:spcPts val="0"/>
               </a:spcAft>
             </a:pPr>
             <a:r>
-              <a:rPr sz="1600">
+              <a:rPr sz="2120">
                 <a:solidFill>
                   <a:srgbClr val="64748B"/>
                 </a:solidFill>
@@ -3783,8 +3783,118 @@
         </p:nvSpPr>
         <p:spPr>
           <a:xfrm>
-            <a:off x="2600960" y="1869440"/>
-            <a:ext cx="1950720" cy="975360"/>
+            <a:off x="3251200" y="2600960"/>
+            <a:ext cx="2600960" cy="1300480"/>
+          </a:xfrm>
+          <a:prstGeom prst="roundRect">
+            <a:avLst>
+              <a:gd name="adj" fmla="val 6250"/>
+            </a:avLst>
+          </a:prstGeom>
+          <a:solidFill>
+            <a:srgbClr val="F8FAFC"/>
+          </a:solidFill>
+          <a:ln w="19050">
+            <a:solidFill>
+              <a:srgbClr val="475569"/>
+            </a:solidFill>
+          </a:ln>
+        </p:spPr>
+        <p:style>
+          <a:lnRef idx="1">
+            <a:schemeClr val="accent1"/>
+          </a:lnRef>
+          <a:fillRef idx="3">
+            <a:schemeClr val="accent1"/>
+          </a:fillRef>
+          <a:effectRef idx="2">
+            <a:schemeClr val="accent1"/>
+          </a:effectRef>
+          <a:fontRef idx="minor">
+            <a:schemeClr val="lt1"/>
+          </a:fontRef>
+        </p:style>
+        <p:txBody>
+          <a:bodyPr rtlCol="0" anchor="t" wrap="none" lIns="0" rIns="0" tIns="262890" bIns="0"/>
+          <a:lstStyle/>
+          <a:p>
+            <a:pPr algn="l" marL="215392">
+              <a:lnSpc>
+                <a:spcPts val="2294"/>
+              </a:lnSpc>
+              <a:spcBef>
+                <a:spcPts val="0"/>
+              </a:spcBef>
+              <a:spcAft>
+                <a:spcPts val="0"/>
+              </a:spcAft>
+            </a:pPr>
+            <a:r>
+              <a:rPr sz="2390" b="1">
+                <a:solidFill>
+                  <a:srgbClr val="374151"/>
+                </a:solidFill>
+                <a:latin typeface="Arial"/>
+              </a:rPr>
+              <a:t>Embedding</a:t>
+            </a:r>
+          </a:p>
+          <a:p>
+            <a:pPr algn="l" marL="215392">
+              <a:lnSpc>
+                <a:spcPts val="2035"/>
+              </a:lnSpc>
+              <a:spcBef>
+                <a:spcPts val="265"/>
+              </a:spcBef>
+              <a:spcAft>
+                <a:spcPts val="0"/>
+              </a:spcAft>
+            </a:pPr>
+            <a:r>
+              <a:rPr sz="2120">
+                <a:solidFill>
+                  <a:srgbClr val="64748B"/>
+                </a:solidFill>
+                <a:latin typeface="Arial"/>
+              </a:rPr>
+              <a:t>vocab 32k, tied</a:t>
+            </a:r>
+          </a:p>
+          <a:p>
+            <a:pPr algn="l" marL="215392">
+              <a:lnSpc>
+                <a:spcPts val="2035"/>
+              </a:lnSpc>
+              <a:spcBef>
+                <a:spcPts val="684"/>
+              </a:spcBef>
+              <a:spcAft>
+                <a:spcPts val="0"/>
+              </a:spcAft>
+            </a:pPr>
+            <a:r>
+              <a:rPr sz="2120">
+                <a:solidFill>
+                  <a:srgbClr val="64748B"/>
+                </a:solidFill>
+                <a:latin typeface="Arial"/>
+              </a:rPr>
+              <a:t>(B, L, d)</a:t>
+            </a:r>
+          </a:p>
+        </p:txBody>
+      </p:sp>
+      <p:sp>
+        <p:nvSpPr>
+          <p:cNvPr id="6" name="Rounded Rectangle 5"/>
+          <p:cNvSpPr/>
+          <p:nvPr/>
+        </p:nvSpPr>
+        <p:spPr>
+          <a:xfrm>
+            <a:off x="6177280" y="2763520"/>
+            <a:ext cx="3007360" cy="975360"/>
           </a:xfrm>
           <a:prstGeom prst="roundRect">
             <a:avLst>
@@ -3815,12 +3925,12 @@
           </a:fontRef>
         </p:style>
         <p:txBody>
-          <a:bodyPr rtlCol="0" anchor="t" wrap="none" lIns="0" rIns="0" tIns="208280" bIns="0"/>
-          <a:lstStyle/>
-          <a:p>
-            <a:pPr algn="l" marL="162560">
+          <a:bodyPr rtlCol="0" anchor="t" wrap="none" lIns="0" rIns="0" tIns="262890" bIns="0"/>
+          <a:lstStyle/>
+          <a:p>
+            <a:pPr algn="l" marL="215392">
               <a:lnSpc>
-                <a:spcPts val="1728"/>
+                <a:spcPts val="2294"/>
               </a:lnSpc>
               <a:spcBef>
                 <a:spcPts val="0"/>
@@ -3830,51 +3940,29 @@
               </a:spcAft>
             </a:pPr>
             <a:r>
-              <a:rPr sz="1800" b="1">
+              <a:rPr sz="2390" b="1">
                 <a:solidFill>
                   <a:srgbClr val="374151"/>
                 </a:solidFill>
                 <a:latin typeface="Arial"/>
               </a:rPr>
-              <a:t>Embedding</a:t>
-            </a:r>
-          </a:p>
-          <a:p>
-            <a:pPr algn="l" marL="162560">
+              <a:t>Rotary position</a:t>
+            </a:r>
+          </a:p>
+          <a:p>
+            <a:pPr algn="l" marL="215392">
               <a:lnSpc>
-                <a:spcPts val="1536"/>
+                <a:spcPts val="2035"/>
               </a:lnSpc>
               <a:spcBef>
-                <a:spcPts val="192"/>
+                <a:spcPts val="425"/>
               </a:spcBef>
               <a:spcAft>
                 <a:spcPts val="0"/>
               </a:spcAft>
             </a:pPr>
             <a:r>
-              <a:rPr sz="1600">
-                <a:solidFill>
-                  <a:srgbClr val="64748B"/>
-                </a:solidFill>
-                <a:latin typeface="Arial"/>
-              </a:rPr>
-              <a:t>vocab 32k, tied</a:t>
-            </a:r>
-          </a:p>
-          <a:p>
-            <a:pPr algn="l" marL="162560">
-              <a:lnSpc>
-                <a:spcPts val="1536"/>
-              </a:lnSpc>
-              <a:spcBef>
-                <a:spcPts val="544"/>
-              </a:spcBef>
-              <a:spcAft>
-                <a:spcPts val="0"/>
-              </a:spcAft>
-            </a:pPr>
-            <a:r>
-              <a:rPr sz="1600">
+              <a:rPr sz="2120">
                 <a:solidFill>
                   <a:srgbClr val="64748B"/>
                 </a:solidFill>
@@ -3887,18 +3975,168 @@
       </p:sp>
       <p:sp>
         <p:nvSpPr>
-          <p:cNvPr id="6" name="Rounded Rectangle 5"/>
+          <p:cNvPr id="7" name="Rounded Rectangle 6"/>
           <p:cNvSpPr/>
           <p:nvPr/>
         </p:nvSpPr>
         <p:spPr>
           <a:xfrm>
-            <a:off x="4795520" y="1950720"/>
-            <a:ext cx="2275840" cy="731520"/>
+            <a:off x="9509760" y="2763520"/>
+            <a:ext cx="1788160" cy="975360"/>
           </a:xfrm>
           <a:prstGeom prst="roundRect">
             <a:avLst>
-              <a:gd name="adj" fmla="val 11111"/>
+              <a:gd name="adj" fmla="val 8333"/>
+            </a:avLst>
+          </a:prstGeom>
+          <a:solidFill>
+            <a:srgbClr val="F8FAFC"/>
+          </a:solidFill>
+          <a:ln w="19050">
+            <a:solidFill>
+              <a:srgbClr val="1E3A5F"/>
+            </a:solidFill>
+          </a:ln>
+        </p:spPr>
+        <p:style>
+          <a:lnRef idx="1">
+            <a:schemeClr val="accent1"/>
+          </a:lnRef>
+          <a:fillRef idx="3">
+            <a:schemeClr val="accent1"/>
+          </a:fillRef>
+          <a:effectRef idx="2">
+            <a:schemeClr val="accent1"/>
+          </a:effectRef>
+          <a:fontRef idx="minor">
+            <a:schemeClr val="lt1"/>
+          </a:fontRef>
+        </p:style>
+        <p:txBody>
+          <a:bodyPr rtlCol="0" anchor="t" wrap="none" lIns="0" rIns="0" tIns="262890" bIns="0"/>
+          <a:lstStyle/>
+          <a:p>
+            <a:pPr algn="l" marL="215392">
+              <a:lnSpc>
+                <a:spcPts val="2294"/>
+              </a:lnSpc>
+              <a:spcBef>
+                <a:spcPts val="0"/>
+              </a:spcBef>
+              <a:spcAft>
+                <a:spcPts val="0"/>
+              </a:spcAft>
+            </a:pPr>
+            <a:r>
+              <a:rPr sz="2390" b="1">
+                <a:solidFill>
+                  <a:srgbClr val="374151"/>
+                </a:solidFill>
+                <a:latin typeface="Arial"/>
+              </a:rPr>
+              <a:t>Block 1</a:t>
+            </a:r>
+          </a:p>
+          <a:p>
+            <a:pPr algn="l" marL="215392">
+              <a:lnSpc>
+                <a:spcPts val="2035"/>
+              </a:lnSpc>
+              <a:spcBef>
+                <a:spcPts val="425"/>
+              </a:spcBef>
+              <a:spcAft>
+                <a:spcPts val="0"/>
+              </a:spcAft>
+            </a:pPr>
+            <a:r>
+              <a:rPr sz="2120">
+                <a:solidFill>
+                  <a:srgbClr val="64748B"/>
+                </a:solidFill>
+                <a:latin typeface="Arial"/>
+              </a:rPr>
+              <a:t>(B, L, d)</a:t>
+            </a:r>
+          </a:p>
+        </p:txBody>
+      </p:sp>
+      <p:sp>
+        <p:nvSpPr>
+          <p:cNvPr id="8" name="Rectangle 7"/>
+          <p:cNvSpPr/>
+          <p:nvPr/>
+        </p:nvSpPr>
+        <p:spPr>
+          <a:xfrm>
+            <a:off x="1463040" y="4307840"/>
+            <a:ext cx="1137920" cy="812800"/>
+          </a:xfrm>
+          <a:prstGeom prst="rect">
+            <a:avLst/>
+          </a:prstGeom>
+          <a:solidFill>
+            <a:srgbClr val="FFFFFF"/>
+          </a:solidFill>
+          <a:ln>
+            <a:noFill/>
+          </a:ln>
+        </p:spPr>
+        <p:style>
+          <a:lnRef idx="1">
+            <a:schemeClr val="accent1"/>
+          </a:lnRef>
+          <a:fillRef idx="3">
+            <a:schemeClr val="accent1"/>
+          </a:fillRef>
+          <a:effectRef idx="2">
+            <a:schemeClr val="accent1"/>
+          </a:effectRef>
+          <a:fontRef idx="minor">
+            <a:schemeClr val="lt1"/>
+          </a:fontRef>
+        </p:style>
+        <p:txBody>
+          <a:bodyPr rtlCol="0" anchor="t" wrap="none" lIns="0" rIns="0" tIns="385826" bIns="0"/>
+          <a:lstStyle/>
+          <a:p>
+            <a:pPr algn="ctr">
+              <a:lnSpc>
+                <a:spcPts val="2294"/>
+              </a:lnSpc>
+              <a:spcBef>
+                <a:spcPts val="0"/>
+              </a:spcBef>
+              <a:spcAft>
+                <a:spcPts val="0"/>
+              </a:spcAft>
+            </a:pPr>
+            <a:r>
+              <a:rPr sz="2390" b="1">
+                <a:solidFill>
+                  <a:srgbClr val="64748B"/>
+                </a:solidFill>
+                <a:latin typeface="Arial"/>
+              </a:rPr>
+              <a:t>• • •</a:t>
+            </a:r>
+          </a:p>
+        </p:txBody>
+      </p:sp>
+      <p:sp>
+        <p:nvSpPr>
+          <p:cNvPr id="9" name="Rounded Rectangle 8"/>
+          <p:cNvSpPr/>
+          <p:nvPr/>
+        </p:nvSpPr>
+        <p:spPr>
+          <a:xfrm>
+            <a:off x="2926080" y="4226560"/>
+            <a:ext cx="1869440" cy="975360"/>
+          </a:xfrm>
+          <a:prstGeom prst="roundRect">
+            <a:avLst>
+              <a:gd name="adj" fmla="val 8333"/>
             </a:avLst>
           </a:prstGeom>
           <a:solidFill>
@@ -3925,12 +4163,12 @@
           </a:fontRef>
         </p:style>
         <p:txBody>
-          <a:bodyPr rtlCol="0" anchor="t" wrap="none" lIns="0" rIns="0" tIns="208280" bIns="0"/>
-          <a:lstStyle/>
-          <a:p>
-            <a:pPr algn="l" marL="162560">
+          <a:bodyPr rtlCol="0" anchor="t" wrap="none" lIns="0" rIns="0" tIns="262890" bIns="0"/>
+          <a:lstStyle/>
+          <a:p>
+            <a:pPr algn="l" marL="215392">
               <a:lnSpc>
-                <a:spcPts val="1728"/>
+                <a:spcPts val="2294"/>
               </a:lnSpc>
               <a:spcBef>
                 <a:spcPts val="0"/>
@@ -3940,29 +4178,29 @@
               </a:spcAft>
             </a:pPr>
             <a:r>
-              <a:rPr sz="1800" b="1">
+              <a:rPr sz="2390" b="1">
                 <a:solidFill>
                   <a:srgbClr val="374151"/>
                 </a:solidFill>
                 <a:latin typeface="Arial"/>
               </a:rPr>
-              <a:t>Rotary position</a:t>
-            </a:r>
-          </a:p>
-          <a:p>
-            <a:pPr algn="l" marL="162560">
+              <a:t>Block N</a:t>
+            </a:r>
+          </a:p>
+          <a:p>
+            <a:pPr algn="l" marL="215392">
               <a:lnSpc>
-                <a:spcPts val="1536"/>
+                <a:spcPts val="2035"/>
               </a:lnSpc>
               <a:spcBef>
-                <a:spcPts val="352"/>
+                <a:spcPts val="425"/>
               </a:spcBef>
               <a:spcAft>
                 <a:spcPts val="0"/>
               </a:spcAft>
             </a:pPr>
             <a:r>
-              <a:rPr sz="1600">
+              <a:rPr sz="2120">
                 <a:solidFill>
                   <a:srgbClr val="64748B"/>
                 </a:solidFill>
@@ -3975,168 +4213,18 @@
       </p:sp>
       <p:sp>
         <p:nvSpPr>
-          <p:cNvPr id="7" name="Rounded Rectangle 6"/>
+          <p:cNvPr id="10" name="Rounded Rectangle 9"/>
           <p:cNvSpPr/>
           <p:nvPr/>
         </p:nvSpPr>
         <p:spPr>
           <a:xfrm>
-            <a:off x="7315200" y="1950720"/>
-            <a:ext cx="1381760" cy="731520"/>
+            <a:off x="5120640" y="4226560"/>
+            <a:ext cx="2275840" cy="975360"/>
           </a:xfrm>
           <a:prstGeom prst="roundRect">
             <a:avLst>
-              <a:gd name="adj" fmla="val 11111"/>
-            </a:avLst>
-          </a:prstGeom>
-          <a:solidFill>
-            <a:srgbClr val="F8FAFC"/>
-          </a:solidFill>
-          <a:ln w="19050">
-            <a:solidFill>
-              <a:srgbClr val="1E3A5F"/>
-            </a:solidFill>
-          </a:ln>
-        </p:spPr>
-        <p:style>
-          <a:lnRef idx="1">
-            <a:schemeClr val="accent1"/>
-          </a:lnRef>
-          <a:fillRef idx="3">
-            <a:schemeClr val="accent1"/>
-          </a:fillRef>
-          <a:effectRef idx="2">
-            <a:schemeClr val="accent1"/>
-          </a:effectRef>
-          <a:fontRef idx="minor">
-            <a:schemeClr val="lt1"/>
-          </a:fontRef>
-        </p:style>
-        <p:txBody>
-          <a:bodyPr rtlCol="0" anchor="t" wrap="none" lIns="0" rIns="0" tIns="208280" bIns="0"/>
-          <a:lstStyle/>
-          <a:p>
-            <a:pPr algn="l" marL="162560">
-              <a:lnSpc>
-                <a:spcPts val="1728"/>
-              </a:lnSpc>
-              <a:spcBef>
-                <a:spcPts val="0"/>
-              </a:spcBef>
-              <a:spcAft>
-                <a:spcPts val="0"/>
-              </a:spcAft>
-            </a:pPr>
-            <a:r>
-              <a:rPr sz="1800" b="1">
-                <a:solidFill>
-                  <a:srgbClr val="374151"/>
-                </a:solidFill>
-                <a:latin typeface="Arial"/>
-              </a:rPr>
-              <a:t>Block 1</a:t>
-            </a:r>
-          </a:p>
-          <a:p>
-            <a:pPr algn="l" marL="162560">
-              <a:lnSpc>
-                <a:spcPts val="1536"/>
-              </a:lnSpc>
-              <a:spcBef>
-                <a:spcPts val="352"/>
-              </a:spcBef>
-              <a:spcAft>
-                <a:spcPts val="0"/>
-              </a:spcAft>
-            </a:pPr>
-            <a:r>
-              <a:rPr sz="1600">
-                <a:solidFill>
-                  <a:srgbClr val="64748B"/>
-                </a:solidFill>
-                <a:latin typeface="Arial"/>
-              </a:rPr>
-              <a:t>(B, L, d)</a:t>
-            </a:r>
-          </a:p>
-        </p:txBody>
-      </p:sp>
-      <p:sp>
-        <p:nvSpPr>
-          <p:cNvPr id="8" name="Rectangle 7"/>
-          <p:cNvSpPr/>
-          <p:nvPr/>
-        </p:nvSpPr>
-        <p:spPr>
-          <a:xfrm>
-            <a:off x="8940800" y="2032000"/>
-            <a:ext cx="894080" cy="650240"/>
-          </a:xfrm>
-          <a:prstGeom prst="rect">
-            <a:avLst/>
-          </a:prstGeom>
-          <a:solidFill>
-            <a:srgbClr val="FFFFFF"/>
-          </a:solidFill>
-          <a:ln>
-            <a:noFill/>
-          </a:ln>
-        </p:spPr>
-        <p:style>
-          <a:lnRef idx="1">
-            <a:schemeClr val="accent1"/>
-          </a:lnRef>
-          <a:fillRef idx="3">
-            <a:schemeClr val="accent1"/>
-          </a:fillRef>
-          <a:effectRef idx="2">
-            <a:schemeClr val="accent1"/>
-          </a:effectRef>
-          <a:fontRef idx="minor">
-            <a:schemeClr val="lt1"/>
-          </a:fontRef>
-        </p:style>
-        <p:txBody>
-          <a:bodyPr rtlCol="0" anchor="t" wrap="none" lIns="0" rIns="0" tIns="320040" bIns="0"/>
-          <a:lstStyle/>
-          <a:p>
-            <a:pPr algn="ctr">
-              <a:lnSpc>
-                <a:spcPts val="1728"/>
-              </a:lnSpc>
-              <a:spcBef>
-                <a:spcPts val="0"/>
-              </a:spcBef>
-              <a:spcAft>
-                <a:spcPts val="0"/>
-              </a:spcAft>
-            </a:pPr>
-            <a:r>
-              <a:rPr sz="1800" b="1">
-                <a:solidFill>
-                  <a:srgbClr val="64748B"/>
-                </a:solidFill>
-                <a:latin typeface="Arial"/>
-              </a:rPr>
-              <a:t>• • •</a:t>
-            </a:r>
-          </a:p>
-        </p:txBody>
-      </p:sp>
-      <p:sp>
-        <p:nvSpPr>
-          <p:cNvPr id="9" name="Rounded Rectangle 8"/>
-          <p:cNvSpPr/>
-          <p:nvPr/>
-        </p:nvSpPr>
-        <p:spPr>
-          <a:xfrm>
-            <a:off x="2357120" y="3088640"/>
-            <a:ext cx="1463040" cy="731520"/>
-          </a:xfrm>
-          <a:prstGeom prst="roundRect">
-            <a:avLst>
-              <a:gd name="adj" fmla="val 11111"/>
+              <a:gd name="adj" fmla="val 8333"/>
             </a:avLst>
           </a:prstGeom>
           <a:solidFill>
@@ -4163,12 +4251,12 @@
           </a:fontRef>
         </p:style>
         <p:txBody>
-          <a:bodyPr rtlCol="0" anchor="t" wrap="none" lIns="0" rIns="0" tIns="208280" bIns="0"/>
-          <a:lstStyle/>
-          <a:p>
-            <a:pPr algn="l" marL="162560">
+          <a:bodyPr rtlCol="0" anchor="t" wrap="none" lIns="0" rIns="0" tIns="262890" bIns="0"/>
+          <a:lstStyle/>
+          <a:p>
+            <a:pPr algn="l" marL="215392">
               <a:lnSpc>
-                <a:spcPts val="1728"/>
+                <a:spcPts val="2294"/>
               </a:lnSpc>
               <a:spcBef>
                 <a:spcPts val="0"/>
@@ -4178,95 +4266,7 @@
               </a:spcAft>
             </a:pPr>
             <a:r>
-              <a:rPr sz="1800" b="1">
-                <a:solidFill>
-                  <a:srgbClr val="374151"/>
-                </a:solidFill>
-                <a:latin typeface="Arial"/>
-              </a:rPr>
-              <a:t>Block N</a:t>
-            </a:r>
-          </a:p>
-          <a:p>
-            <a:pPr algn="l" marL="162560">
-              <a:lnSpc>
-                <a:spcPts val="1536"/>
-              </a:lnSpc>
-              <a:spcBef>
-                <a:spcPts val="352"/>
-              </a:spcBef>
-              <a:spcAft>
-                <a:spcPts val="0"/>
-              </a:spcAft>
-            </a:pPr>
-            <a:r>
-              <a:rPr sz="1600">
-                <a:solidFill>
-                  <a:srgbClr val="64748B"/>
-                </a:solidFill>
-                <a:latin typeface="Arial"/>
-              </a:rPr>
-              <a:t>(B, L, d)</a:t>
-            </a:r>
-          </a:p>
-        </p:txBody>
-      </p:sp>
-      <p:sp>
-        <p:nvSpPr>
-          <p:cNvPr id="10" name="Rounded Rectangle 9"/>
-          <p:cNvSpPr/>
-          <p:nvPr/>
-        </p:nvSpPr>
-        <p:spPr>
-          <a:xfrm>
-            <a:off x="4064000" y="3088640"/>
-            <a:ext cx="1706880" cy="731520"/>
-          </a:xfrm>
-          <a:prstGeom prst="roundRect">
-            <a:avLst>
-              <a:gd name="adj" fmla="val 11111"/>
-            </a:avLst>
-          </a:prstGeom>
-          <a:solidFill>
-            <a:srgbClr val="F8FAFC"/>
-          </a:solidFill>
-          <a:ln w="19050">
-            <a:solidFill>
-              <a:srgbClr val="475569"/>
-            </a:solidFill>
-          </a:ln>
-        </p:spPr>
-        <p:style>
-          <a:lnRef idx="1">
-            <a:schemeClr val="accent1"/>
-          </a:lnRef>
-          <a:fillRef idx="3">
-            <a:schemeClr val="accent1"/>
-          </a:fillRef>
-          <a:effectRef idx="2">
-            <a:schemeClr val="accent1"/>
-          </a:effectRef>
-          <a:fontRef idx="minor">
-            <a:schemeClr val="lt1"/>
-          </a:fontRef>
-        </p:style>
-        <p:txBody>
-          <a:bodyPr rtlCol="0" anchor="t" wrap="none" lIns="0" rIns="0" tIns="208280" bIns="0"/>
-          <a:lstStyle/>
-          <a:p>
-            <a:pPr algn="l" marL="162560">
-              <a:lnSpc>
-                <a:spcPts val="1728"/>
-              </a:lnSpc>
-              <a:spcBef>
-                <a:spcPts val="0"/>
-              </a:spcBef>
-              <a:spcAft>
-                <a:spcPts val="0"/>
-              </a:spcAft>
-            </a:pPr>
-            <a:r>
-              <a:rPr sz="1800" b="1">
+              <a:rPr sz="2390" b="1">
                 <a:solidFill>
                   <a:srgbClr val="374151"/>
                 </a:solidFill>
@@ -4276,19 +4276,19 @@
             </a:r>
           </a:p>
           <a:p>
-            <a:pPr algn="l" marL="162560">
+            <a:pPr algn="l" marL="215392">
               <a:lnSpc>
-                <a:spcPts val="1536"/>
+                <a:spcPts val="2035"/>
               </a:lnSpc>
               <a:spcBef>
-                <a:spcPts val="352"/>
+                <a:spcPts val="425"/>
               </a:spcBef>
               <a:spcAft>
                 <a:spcPts val="0"/>
               </a:spcAft>
             </a:pPr>
             <a:r>
-              <a:rPr sz="1600">
+              <a:rPr sz="2120">
                 <a:solidFill>
                   <a:srgbClr val="64748B"/>
                 </a:solidFill>
@@ -4307,12 +4307,12 @@
         </p:nvSpPr>
         <p:spPr>
           <a:xfrm>
-            <a:off x="6014720" y="3088640"/>
-            <a:ext cx="2194560" cy="731520"/>
+            <a:off x="7721600" y="4226560"/>
+            <a:ext cx="2844800" cy="975360"/>
           </a:xfrm>
           <a:prstGeom prst="roundRect">
             <a:avLst>
-              <a:gd name="adj" fmla="val 11111"/>
+              <a:gd name="adj" fmla="val 8333"/>
             </a:avLst>
           </a:prstGeom>
           <a:solidFill>
@@ -4339,12 +4339,12 @@
           </a:fontRef>
         </p:style>
         <p:txBody>
-          <a:bodyPr rtlCol="0" anchor="t" wrap="none" lIns="0" rIns="0" tIns="208280" bIns="0"/>
-          <a:lstStyle/>
-          <a:p>
-            <a:pPr algn="l" marL="162560">
+          <a:bodyPr rtlCol="0" anchor="t" wrap="none" lIns="0" rIns="0" tIns="262890" bIns="0"/>
+          <a:lstStyle/>
+          <a:p>
+            <a:pPr algn="l" marL="215392">
               <a:lnSpc>
-                <a:spcPts val="1728"/>
+                <a:spcPts val="2294"/>
               </a:lnSpc>
               <a:spcBef>
                 <a:spcPts val="0"/>
@@ -4354,7 +4354,7 @@
               </a:spcAft>
             </a:pPr>
             <a:r>
-              <a:rPr sz="1800" b="1">
+              <a:rPr sz="2390" b="1">
                 <a:solidFill>
                   <a:srgbClr val="374151"/>
                 </a:solidFill>
@@ -4364,19 +4364,19 @@
             </a:r>
           </a:p>
           <a:p>
-            <a:pPr algn="l" marL="162560">
+            <a:pPr algn="l" marL="215392">
               <a:lnSpc>
-                <a:spcPts val="1536"/>
+                <a:spcPts val="2035"/>
               </a:lnSpc>
               <a:spcBef>
-                <a:spcPts val="352"/>
+                <a:spcPts val="425"/>
               </a:spcBef>
               <a:spcAft>
                 <a:spcPts val="0"/>
               </a:spcAft>
             </a:pPr>
             <a:r>
-              <a:rPr sz="1600">
+              <a:rPr sz="2120">
                 <a:solidFill>
                   <a:srgbClr val="64748B"/>
                 </a:solidFill>
@@ -4395,8 +4395,8 @@
         </p:nvCxnSpPr>
         <p:spPr>
           <a:xfrm>
-            <a:off x="2357120" y="2316480"/>
-            <a:ext cx="81280" cy="0"/>
+            <a:off x="2926080" y="3251200"/>
+            <a:ext cx="325120" cy="0"/>
           </a:xfrm>
           <a:prstGeom prst="line">
             <a:avLst/>
@@ -4405,6 +4405,7 @@
             <a:solidFill>
               <a:srgbClr val="475569"/>
             </a:solidFill>
+            <a:tailEnd type="triangle" w="med" len="med"/>
           </a:ln>
         </p:spPr>
         <p:style>
@@ -4430,8 +4431,8 @@
         </p:nvCxnSpPr>
         <p:spPr>
           <a:xfrm>
-            <a:off x="2438400" y="2316480"/>
-            <a:ext cx="0" cy="40640"/>
+            <a:off x="5852160" y="3251200"/>
+            <a:ext cx="325120" cy="0"/>
           </a:xfrm>
           <a:prstGeom prst="line">
             <a:avLst/>
@@ -4440,6 +4441,7 @@
             <a:solidFill>
               <a:srgbClr val="475569"/>
             </a:solidFill>
+            <a:tailEnd type="triangle" w="med" len="med"/>
           </a:ln>
         </p:spPr>
         <p:style>
@@ -4465,8 +4467,8 @@
         </p:nvCxnSpPr>
         <p:spPr>
           <a:xfrm>
-            <a:off x="2438400" y="2357120"/>
-            <a:ext cx="162560" cy="0"/>
+            <a:off x="9184640" y="3251200"/>
+            <a:ext cx="325120" cy="0"/>
           </a:xfrm>
           <a:prstGeom prst="line">
             <a:avLst/>
@@ -4501,8 +4503,8 @@
         </p:nvCxnSpPr>
         <p:spPr>
           <a:xfrm>
-            <a:off x="4551680" y="2357120"/>
-            <a:ext cx="81280" cy="0"/>
+            <a:off x="4795520" y="4714240"/>
+            <a:ext cx="325120" cy="0"/>
           </a:xfrm>
           <a:prstGeom prst="line">
             <a:avLst/>
@@ -4511,6 +4513,7 @@
             <a:solidFill>
               <a:srgbClr val="475569"/>
             </a:solidFill>
+            <a:tailEnd type="triangle" w="med" len="med"/>
           </a:ln>
         </p:spPr>
         <p:style>
@@ -4535,44 +4538,9 @@
           <p:nvPr/>
         </p:nvCxnSpPr>
         <p:spPr>
-          <a:xfrm flipV="1">
-            <a:off x="4632960" y="2316480"/>
-            <a:ext cx="0" cy="40640"/>
-          </a:xfrm>
-          <a:prstGeom prst="line">
-            <a:avLst/>
-          </a:prstGeom>
-          <a:ln w="25400">
-            <a:solidFill>
-              <a:srgbClr val="475569"/>
-            </a:solidFill>
-          </a:ln>
-        </p:spPr>
-        <p:style>
-          <a:lnRef idx="2">
-            <a:schemeClr val="accent1"/>
-          </a:lnRef>
-          <a:fillRef idx="0">
-            <a:schemeClr val="accent1"/>
-          </a:fillRef>
-          <a:effectRef idx="1">
-            <a:schemeClr val="accent1"/>
-          </a:effectRef>
-          <a:fontRef idx="minor">
-            <a:schemeClr val="tx1"/>
-          </a:fontRef>
-        </p:style>
-      </p:cxnSp>
-      <p:cxnSp>
-        <p:nvCxnSpPr>
-          <p:cNvPr id="17" name="Connector 16"/>
-          <p:cNvCxnSpPr/>
-          <p:nvPr/>
-        </p:nvCxnSpPr>
-        <p:spPr>
-          <a:xfrm>
-            <a:off x="4632960" y="2316480"/>
-            <a:ext cx="162560" cy="0"/>
+          <a:xfrm>
+            <a:off x="7396480" y="4714240"/>
+            <a:ext cx="325120" cy="0"/>
           </a:xfrm>
           <a:prstGeom prst="line">
             <a:avLst/>
@@ -4599,117 +4567,9 @@
           </a:fontRef>
         </p:style>
       </p:cxnSp>
-      <p:cxnSp>
-        <p:nvCxnSpPr>
-          <p:cNvPr id="18" name="Connector 17"/>
-          <p:cNvCxnSpPr/>
-          <p:nvPr/>
-        </p:nvCxnSpPr>
-        <p:spPr>
-          <a:xfrm>
-            <a:off x="7071360" y="2316480"/>
-            <a:ext cx="243840" cy="0"/>
-          </a:xfrm>
-          <a:prstGeom prst="line">
-            <a:avLst/>
-          </a:prstGeom>
-          <a:ln w="25400">
-            <a:solidFill>
-              <a:srgbClr val="475569"/>
-            </a:solidFill>
-            <a:tailEnd type="triangle" w="med" len="med"/>
-          </a:ln>
-        </p:spPr>
-        <p:style>
-          <a:lnRef idx="2">
-            <a:schemeClr val="accent1"/>
-          </a:lnRef>
-          <a:fillRef idx="0">
-            <a:schemeClr val="accent1"/>
-          </a:fillRef>
-          <a:effectRef idx="1">
-            <a:schemeClr val="accent1"/>
-          </a:effectRef>
-          <a:fontRef idx="minor">
-            <a:schemeClr val="tx1"/>
-          </a:fontRef>
-        </p:style>
-      </p:cxnSp>
-      <p:cxnSp>
-        <p:nvCxnSpPr>
-          <p:cNvPr id="19" name="Connector 18"/>
-          <p:cNvCxnSpPr/>
-          <p:nvPr/>
-        </p:nvCxnSpPr>
-        <p:spPr>
-          <a:xfrm>
-            <a:off x="3820160" y="3454400"/>
-            <a:ext cx="243840" cy="0"/>
-          </a:xfrm>
-          <a:prstGeom prst="line">
-            <a:avLst/>
-          </a:prstGeom>
-          <a:ln w="25400">
-            <a:solidFill>
-              <a:srgbClr val="475569"/>
-            </a:solidFill>
-            <a:tailEnd type="triangle" w="med" len="med"/>
-          </a:ln>
-        </p:spPr>
-        <p:style>
-          <a:lnRef idx="2">
-            <a:schemeClr val="accent1"/>
-          </a:lnRef>
-          <a:fillRef idx="0">
-            <a:schemeClr val="accent1"/>
-          </a:fillRef>
-          <a:effectRef idx="1">
-            <a:schemeClr val="accent1"/>
-          </a:effectRef>
-          <a:fontRef idx="minor">
-            <a:schemeClr val="tx1"/>
-          </a:fontRef>
-        </p:style>
-      </p:cxnSp>
-      <p:cxnSp>
-        <p:nvCxnSpPr>
-          <p:cNvPr id="20" name="Connector 19"/>
-          <p:cNvCxnSpPr/>
-          <p:nvPr/>
-        </p:nvCxnSpPr>
-        <p:spPr>
-          <a:xfrm>
-            <a:off x="5770880" y="3454400"/>
-            <a:ext cx="243840" cy="0"/>
-          </a:xfrm>
-          <a:prstGeom prst="line">
-            <a:avLst/>
-          </a:prstGeom>
-          <a:ln w="25400">
-            <a:solidFill>
-              <a:srgbClr val="475569"/>
-            </a:solidFill>
-            <a:tailEnd type="triangle" w="med" len="med"/>
-          </a:ln>
-        </p:spPr>
-        <p:style>
-          <a:lnRef idx="2">
-            <a:schemeClr val="accent1"/>
-          </a:lnRef>
-          <a:fillRef idx="0">
-            <a:schemeClr val="accent1"/>
-          </a:fillRef>
-          <a:effectRef idx="1">
-            <a:schemeClr val="accent1"/>
-          </a:effectRef>
-          <a:fontRef idx="minor">
-            <a:schemeClr val="tx1"/>
-          </a:fontRef>
-        </p:style>
-      </p:cxnSp>
-      <p:sp>
-        <p:nvSpPr>
-          <p:cNvPr id="21" name="TextBox 20"/>
+      <p:sp>
+        <p:nvSpPr>
+          <p:cNvPr id="17" name="TextBox 16"/>
           <p:cNvSpPr txBox="1"/>
           <p:nvPr/>
         </p:nvSpPr>
@@ -4744,7 +4604,7 @@
       </p:sp>
       <p:sp>
         <p:nvSpPr>
-          <p:cNvPr id="22" name="TextBox 21"/>
+          <p:cNvPr id="18" name="TextBox 17"/>
           <p:cNvSpPr txBox="1"/>
           <p:nvPr/>
         </p:nvSpPr>
@@ -4779,7 +4639,7 @@
       </p:sp>
       <p:sp>
         <p:nvSpPr>
-          <p:cNvPr id="23" name="TextBox 22"/>
+          <p:cNvPr id="19" name="TextBox 18"/>
           <p:cNvSpPr txBox="1"/>
           <p:nvPr/>
         </p:nvSpPr>
@@ -4881,7 +4741,7 @@
         </p:nvSpPr>
         <p:spPr>
           <a:xfrm>
-            <a:off x="487680" y="1300480"/>
+            <a:off x="2763520" y="1300480"/>
             <a:ext cx="6583680" cy="2275840"/>
           </a:xfrm>
           <a:prstGeom prst="roundRect">
@@ -4946,7 +4806,7 @@
         </p:nvSpPr>
         <p:spPr>
           <a:xfrm>
-            <a:off x="731520" y="1869440"/>
+            <a:off x="3007360" y="1869440"/>
             <a:ext cx="6096000" cy="1463040"/>
           </a:xfrm>
           <a:prstGeom prst="roundRect">
@@ -4992,7 +4852,7 @@
         </p:nvSpPr>
         <p:spPr>
           <a:xfrm>
-            <a:off x="975360" y="2194560"/>
+            <a:off x="3251200" y="2194560"/>
             <a:ext cx="1788160" cy="731520"/>
           </a:xfrm>
           <a:prstGeom prst="roundRect">
@@ -5080,7 +4940,7 @@
         </p:nvSpPr>
         <p:spPr>
           <a:xfrm>
-            <a:off x="3007360" y="2113280"/>
+            <a:off x="5283200" y="2113280"/>
             <a:ext cx="2682240" cy="975360"/>
           </a:xfrm>
           <a:prstGeom prst="roundRect">
@@ -5190,7 +5050,7 @@
         </p:nvSpPr>
         <p:spPr>
           <a:xfrm>
-            <a:off x="5933440" y="2275840"/>
+            <a:off x="8209280" y="2275840"/>
             <a:ext cx="650240" cy="650240"/>
           </a:xfrm>
           <a:prstGeom prst="ellipse">
@@ -5254,7 +5114,7 @@
         </p:nvSpPr>
         <p:spPr>
           <a:xfrm>
-            <a:off x="487680" y="3820160"/>
+            <a:off x="2763520" y="3820160"/>
             <a:ext cx="6177280" cy="2275840"/>
           </a:xfrm>
           <a:prstGeom prst="roundRect">
@@ -5319,7 +5179,7 @@
         </p:nvSpPr>
         <p:spPr>
           <a:xfrm>
-            <a:off x="731520" y="4389120"/>
+            <a:off x="3007360" y="4389120"/>
             <a:ext cx="5689600" cy="1463040"/>
           </a:xfrm>
           <a:prstGeom prst="roundRect">
@@ -5365,7 +5225,7 @@
         </p:nvSpPr>
         <p:spPr>
           <a:xfrm>
-            <a:off x="975360" y="4714240"/>
+            <a:off x="3251200" y="4714240"/>
             <a:ext cx="1788160" cy="731520"/>
           </a:xfrm>
           <a:prstGeom prst="roundRect">
@@ -5453,7 +5313,7 @@
         </p:nvSpPr>
         <p:spPr>
           <a:xfrm>
-            <a:off x="3007360" y="4632960"/>
+            <a:off x="5283200" y="4632960"/>
             <a:ext cx="2275840" cy="975360"/>
           </a:xfrm>
           <a:prstGeom prst="roundRect">
@@ -5563,7 +5423,7 @@
         </p:nvSpPr>
         <p:spPr>
           <a:xfrm>
-            <a:off x="5527040" y="4795520"/>
+            <a:off x="7802880" y="4795520"/>
             <a:ext cx="650240" cy="650240"/>
           </a:xfrm>
           <a:prstGeom prst="ellipse">
@@ -5627,7 +5487,7 @@
         </p:nvCxnSpPr>
         <p:spPr>
           <a:xfrm>
-            <a:off x="2763520" y="2560320"/>
+            <a:off x="5039360" y="2560320"/>
             <a:ext cx="81280" cy="0"/>
           </a:xfrm>
           <a:prstGeom prst="line">
@@ -5662,7 +5522,7 @@
         </p:nvCxnSpPr>
         <p:spPr>
           <a:xfrm>
-            <a:off x="2844800" y="2560320"/>
+            <a:off x="5120640" y="2560320"/>
             <a:ext cx="0" cy="40640"/>
           </a:xfrm>
           <a:prstGeom prst="line">
@@ -5697,7 +5557,7 @@
         </p:nvCxnSpPr>
         <p:spPr>
           <a:xfrm>
-            <a:off x="2844800" y="2600960"/>
+            <a:off x="5120640" y="2600960"/>
             <a:ext cx="162560" cy="0"/>
           </a:xfrm>
           <a:prstGeom prst="line">
@@ -5733,7 +5593,7 @@
         </p:nvCxnSpPr>
         <p:spPr>
           <a:xfrm>
-            <a:off x="5689600" y="2600960"/>
+            <a:off x="7965440" y="2600960"/>
             <a:ext cx="243840" cy="0"/>
           </a:xfrm>
           <a:prstGeom prst="line">
@@ -5769,7 +5629,7 @@
         </p:nvCxnSpPr>
         <p:spPr>
           <a:xfrm>
-            <a:off x="2763520" y="5080000"/>
+            <a:off x="5039360" y="5080000"/>
             <a:ext cx="81280" cy="0"/>
           </a:xfrm>
           <a:prstGeom prst="line">
@@ -5804,7 +5664,7 @@
         </p:nvCxnSpPr>
         <p:spPr>
           <a:xfrm>
-            <a:off x="2844800" y="5080000"/>
+            <a:off x="5120640" y="5080000"/>
             <a:ext cx="0" cy="40640"/>
           </a:xfrm>
           <a:prstGeom prst="line">
@@ -5839,7 +5699,7 @@
         </p:nvCxnSpPr>
         <p:spPr>
           <a:xfrm>
-            <a:off x="2844800" y="5120640"/>
+            <a:off x="5120640" y="5120640"/>
             <a:ext cx="162560" cy="0"/>
           </a:xfrm>
           <a:prstGeom prst="line">
@@ -5875,7 +5735,7 @@
         </p:nvCxnSpPr>
         <p:spPr>
           <a:xfrm>
-            <a:off x="5283200" y="5120640"/>
+            <a:off x="7559040" y="5120640"/>
             <a:ext cx="243840" cy="0"/>
           </a:xfrm>
           <a:prstGeom prst="line">
@@ -5911,8 +5771,8 @@
         </p:nvCxnSpPr>
         <p:spPr>
           <a:xfrm flipV="1">
-            <a:off x="1869440" y="1991360"/>
-            <a:ext cx="0" cy="203200"/>
+            <a:off x="4145280" y="1910080"/>
+            <a:ext cx="0" cy="284480"/>
           </a:xfrm>
           <a:prstGeom prst="line">
             <a:avLst/>
@@ -5946,7 +5806,7 @@
         </p:nvCxnSpPr>
         <p:spPr>
           <a:xfrm>
-            <a:off x="1869440" y="1991360"/>
+            <a:off x="4145280" y="1910080"/>
             <a:ext cx="4389120" cy="0"/>
           </a:xfrm>
           <a:prstGeom prst="line">
@@ -5981,8 +5841,8 @@
         </p:nvCxnSpPr>
         <p:spPr>
           <a:xfrm>
-            <a:off x="6258560" y="1991360"/>
-            <a:ext cx="0" cy="284480"/>
+            <a:off x="8534400" y="1910080"/>
+            <a:ext cx="0" cy="365760"/>
           </a:xfrm>
           <a:prstGeom prst="line">
             <a:avLst/>
@@ -6017,8 +5877,8 @@
         </p:nvCxnSpPr>
         <p:spPr>
           <a:xfrm flipV="1">
-            <a:off x="1869440" y="4511040"/>
-            <a:ext cx="0" cy="203200"/>
+            <a:off x="4145280" y="4429760"/>
+            <a:ext cx="0" cy="284480"/>
           </a:xfrm>
           <a:prstGeom prst="line">
             <a:avLst/>
@@ -6052,7 +5912,7 @@
         </p:nvCxnSpPr>
         <p:spPr>
           <a:xfrm>
-            <a:off x="1869440" y="4511040"/>
+            <a:off x="4145280" y="4429760"/>
             <a:ext cx="3982720" cy="0"/>
           </a:xfrm>
           <a:prstGeom prst="line">
@@ -6087,8 +5947,8 @@
         </p:nvCxnSpPr>
         <p:spPr>
           <a:xfrm>
-            <a:off x="5852160" y="4511040"/>
-            <a:ext cx="0" cy="284480"/>
+            <a:off x="8128000" y="4429760"/>
+            <a:ext cx="0" cy="365760"/>
           </a:xfrm>
           <a:prstGeom prst="line">
             <a:avLst/>
@@ -6123,7 +5983,7 @@
         </p:nvCxnSpPr>
         <p:spPr>
           <a:xfrm>
-            <a:off x="6258560" y="2926080"/>
+            <a:off x="8534400" y="2926080"/>
             <a:ext cx="0" cy="894080"/>
           </a:xfrm>
           <a:prstGeom prst="line">
@@ -6158,7 +6018,7 @@
         </p:nvCxnSpPr>
         <p:spPr>
           <a:xfrm flipH="1">
-            <a:off x="1869440" y="3820160"/>
+            <a:off x="4145280" y="3820160"/>
             <a:ext cx="4389120" cy="0"/>
           </a:xfrm>
           <a:prstGeom prst="line">
@@ -6193,7 +6053,7 @@
         </p:nvCxnSpPr>
         <p:spPr>
           <a:xfrm>
-            <a:off x="1869440" y="3820160"/>
+            <a:off x="4145280" y="3820160"/>
             <a:ext cx="0" cy="894080"/>
           </a:xfrm>
           <a:prstGeom prst="line">
